--- a/output/presentation/techflow-activepieces-rag-orchestration.pptx
+++ b/output/presentation/techflow-activepieces-rag-orchestration.pptx
@@ -2,21 +2,21 @@
 <file path=ppt/presentation.xml><?xml version="1.0" encoding="utf-8"?>
 <p:presentation xmlns:p="http://schemas.openxmlformats.org/presentationml/2006/main">
   <p:sldMasterIdLst>
-    <p:sldMasterId xmlns:r="http://schemas.openxmlformats.org/officeDocument/2006/relationships" id="2147483648" r:id="R4b18e21823f74bde"/>
+    <p:sldMasterId xmlns:r="http://schemas.openxmlformats.org/officeDocument/2006/relationships" id="2147483648" r:id="R55a4b57f00e24799"/>
   </p:sldMasterIdLst>
   <p:notesMasterIdLst>
-    <p:notesMasterId xmlns:r="http://schemas.openxmlformats.org/officeDocument/2006/relationships" r:id="Rc9c2c7dd30114551"/>
+    <p:notesMasterId xmlns:r="http://schemas.openxmlformats.org/officeDocument/2006/relationships" r:id="R53988441ad2541ef"/>
   </p:notesMasterIdLst>
   <p:sldIdLst>
-    <p:sldId xmlns:r="http://schemas.openxmlformats.org/officeDocument/2006/relationships" id="256" r:id="R0fa1a6a23f51488c"/>
-    <p:sldId xmlns:r="http://schemas.openxmlformats.org/officeDocument/2006/relationships" id="257" r:id="R6d0e9c4d493e4ff7"/>
-    <p:sldId xmlns:r="http://schemas.openxmlformats.org/officeDocument/2006/relationships" id="258" r:id="Rbbf25ffe73d8457e"/>
-    <p:sldId xmlns:r="http://schemas.openxmlformats.org/officeDocument/2006/relationships" id="259" r:id="Rafe232cf40bf4b33"/>
-    <p:sldId xmlns:r="http://schemas.openxmlformats.org/officeDocument/2006/relationships" id="260" r:id="Rc7e298f2297c4e6b"/>
-    <p:sldId xmlns:r="http://schemas.openxmlformats.org/officeDocument/2006/relationships" id="261" r:id="Re5efd93b01df4808"/>
-    <p:sldId xmlns:r="http://schemas.openxmlformats.org/officeDocument/2006/relationships" id="262" r:id="R059d698a952d428b"/>
-    <p:sldId xmlns:r="http://schemas.openxmlformats.org/officeDocument/2006/relationships" id="263" r:id="R4c7d62f949524d64"/>
-    <p:sldId xmlns:r="http://schemas.openxmlformats.org/officeDocument/2006/relationships" id="264" r:id="R70d109b4e45d4cf4"/>
+    <p:sldId xmlns:r="http://schemas.openxmlformats.org/officeDocument/2006/relationships" id="256" r:id="Rca686ab3d5794fed"/>
+    <p:sldId xmlns:r="http://schemas.openxmlformats.org/officeDocument/2006/relationships" id="257" r:id="R3fc3f011f270486c"/>
+    <p:sldId xmlns:r="http://schemas.openxmlformats.org/officeDocument/2006/relationships" id="258" r:id="Rfc4bc0cd05d34f51"/>
+    <p:sldId xmlns:r="http://schemas.openxmlformats.org/officeDocument/2006/relationships" id="259" r:id="R1b14e709fcca4910"/>
+    <p:sldId xmlns:r="http://schemas.openxmlformats.org/officeDocument/2006/relationships" id="260" r:id="R08855ca5df2d41f8"/>
+    <p:sldId xmlns:r="http://schemas.openxmlformats.org/officeDocument/2006/relationships" id="261" r:id="R428da8e744b44cd5"/>
+    <p:sldId xmlns:r="http://schemas.openxmlformats.org/officeDocument/2006/relationships" id="262" r:id="Rb0378e9b273e46b2"/>
+    <p:sldId xmlns:r="http://schemas.openxmlformats.org/officeDocument/2006/relationships" id="263" r:id="R712a00ea37b24828"/>
+    <p:sldId xmlns:r="http://schemas.openxmlformats.org/officeDocument/2006/relationships" id="264" r:id="R23538451138a4b72"/>
   </p:sldIdLst>
   <p:sldSz cx="12192000" cy="6858000"/>
   <p:notesSz cx="6858000" cy="9144000"/>
@@ -1133,7 +1133,7 @@
   </p:cSld>
   <p:clrMap bg1="lt1" tx1="dk1" bg2="lt2" tx2="dk2" accent1="accent1" accent2="accent2" accent3="accent3" accent4="accent4" accent5="accent5" accent6="accent6" hlink="hlink" folHlink="folHlink"/>
   <p:sldLayoutIdLst>
-    <p:sldLayoutId xmlns:r="http://schemas.openxmlformats.org/officeDocument/2006/relationships" id="2147483649" r:id="R3403196e2b7e455e"/>
+    <p:sldLayoutId xmlns:r="http://schemas.openxmlformats.org/officeDocument/2006/relationships" id="2147483649" r:id="R41654042341d48cc"/>
   </p:sldLayoutIdLst>
   <p:txStyles>
     <p:titleStyle>
@@ -1677,7 +1677,7 @@
           <p:cNvPr id="4" name="Title-3-1">
             <a:extLst xmlns:a="http://schemas.openxmlformats.org/drawingml/2006/main">
               <a:ext uri="{FF2B5EF4-FFF2-40B4-BE49-F238E27FC236}">
-                <a16:creationId xmlns:a16="http://schemas.microsoft.com/office/drawing/2014/main" id="{B4F903A2-56F8-4F6C-AF67-8EC5062012E1}"/>
+                <a16:creationId xmlns:a16="http://schemas.microsoft.com/office/drawing/2014/main" id="{CB4199BE-F56D-40E1-8F22-A64308C38989}"/>
               </a:ext>
             </a:extLst>
           </p:cNvPr>
@@ -1723,7 +1723,7 @@
           <p:cNvPr id="2" name="Subtitle-4-2">
             <a:extLst xmlns:a="http://schemas.openxmlformats.org/drawingml/2006/main">
               <a:ext uri="{FF2B5EF4-FFF2-40B4-BE49-F238E27FC236}">
-                <a16:creationId xmlns:a16="http://schemas.microsoft.com/office/drawing/2014/main" id="{2A9740B3-AD62-40D8-83D3-8B5A2F99E7BA}"/>
+                <a16:creationId xmlns:a16="http://schemas.microsoft.com/office/drawing/2014/main" id="{E996B000-5F1C-453B-B71E-9120A0CC322D}"/>
               </a:ext>
             </a:extLst>
           </p:cNvPr>
@@ -1768,7 +1768,7 @@
           <p:cNvPr id="3" name="Subtitle-4-3">
             <a:extLst xmlns:a="http://schemas.openxmlformats.org/drawingml/2006/main">
               <a:ext uri="{FF2B5EF4-FFF2-40B4-BE49-F238E27FC236}">
-                <a16:creationId xmlns:a16="http://schemas.microsoft.com/office/drawing/2014/main" id="{0C8899FC-33F8-4D9D-A11B-9C2C219B099B}"/>
+                <a16:creationId xmlns:a16="http://schemas.microsoft.com/office/drawing/2014/main" id="{A39F1F6E-3488-4B6E-95C4-EE8C9E8F9B3F}"/>
               </a:ext>
             </a:extLst>
           </p:cNvPr>
@@ -1811,7 +1811,7 @@
     </p:spTree>
     <p:extLst>
       <p:ext uri="{BB962C8B-B14F-4D97-AF65-F5344CB8AC3E}">
-        <p14:creationId xmlns:p14="http://schemas.microsoft.com/office/powerpoint/2010/main" val="1186824834"/>
+        <p14:creationId xmlns:p14="http://schemas.microsoft.com/office/powerpoint/2010/main" val="248091737"/>
       </p:ext>
     </p:extLst>
   </p:cSld>
@@ -1835,7 +1835,7 @@
           <p:cNvPr id="13" name="Slide-Number-Placeholder-3-2">
             <a:extLst xmlns:a="http://schemas.openxmlformats.org/drawingml/2006/main">
               <a:ext uri="{FF2B5EF4-FFF2-40B4-BE49-F238E27FC236}">
-                <a16:creationId xmlns:a16="http://schemas.microsoft.com/office/drawing/2014/main" id="{F26A685A-DA27-4A02-A7D6-5663EE94111A}"/>
+                <a16:creationId xmlns:a16="http://schemas.microsoft.com/office/drawing/2014/main" id="{8377C07F-1A04-457E-8877-9B4BB5D80A62}"/>
               </a:ext>
             </a:extLst>
           </p:cNvPr>
@@ -1878,7 +1878,7 @@
           <p:cNvPr id="2" name="Title-10-3">
             <a:extLst xmlns:a="http://schemas.openxmlformats.org/drawingml/2006/main">
               <a:ext uri="{FF2B5EF4-FFF2-40B4-BE49-F238E27FC236}">
-                <a16:creationId xmlns:a16="http://schemas.microsoft.com/office/drawing/2014/main" id="{BAE9E84E-4D7B-4FA2-AE84-5B706E3AEE33}"/>
+                <a16:creationId xmlns:a16="http://schemas.microsoft.com/office/drawing/2014/main" id="{71D41F0C-9633-45CD-9A3B-3FF3685B46C4}"/>
               </a:ext>
             </a:extLst>
           </p:cNvPr>
@@ -1945,7 +1945,7 @@
           <p:cNvPr id="4" name="Google-Shape-2260-p159-5">
             <a:extLst xmlns:a="http://schemas.openxmlformats.org/drawingml/2006/main">
               <a:ext uri="{FF2B5EF4-FFF2-40B4-BE49-F238E27FC236}">
-                <a16:creationId xmlns:a16="http://schemas.microsoft.com/office/drawing/2014/main" id="{24014DEA-AE12-417D-B90F-470833ABA034}"/>
+                <a16:creationId xmlns:a16="http://schemas.microsoft.com/office/drawing/2014/main" id="{18AA9223-8F13-481C-91CA-89798A71C760}"/>
               </a:ext>
             </a:extLst>
           </p:cNvPr>
@@ -1972,7 +1972,7 @@
           <p:cNvPr id="5" name="Google-Shape-2261-p159-6">
             <a:extLst xmlns:a="http://schemas.openxmlformats.org/drawingml/2006/main">
               <a:ext uri="{FF2B5EF4-FFF2-40B4-BE49-F238E27FC236}">
-                <a16:creationId xmlns:a16="http://schemas.microsoft.com/office/drawing/2014/main" id="{7D966083-9FF8-4CDD-8194-AC6CC7B1EED9}"/>
+                <a16:creationId xmlns:a16="http://schemas.microsoft.com/office/drawing/2014/main" id="{C9A5C044-D33B-4059-9435-C71CCC282394}"/>
               </a:ext>
             </a:extLst>
           </p:cNvPr>
@@ -1999,7 +1999,7 @@
           <p:cNvPr id="6" name="Google-Shape-2262-p159-7">
             <a:extLst xmlns:a="http://schemas.openxmlformats.org/drawingml/2006/main">
               <a:ext uri="{FF2B5EF4-FFF2-40B4-BE49-F238E27FC236}">
-                <a16:creationId xmlns:a16="http://schemas.microsoft.com/office/drawing/2014/main" id="{3258AB66-4BF2-4CA4-A7D1-58B80D99D9DC}"/>
+                <a16:creationId xmlns:a16="http://schemas.microsoft.com/office/drawing/2014/main" id="{6B00186C-EEB3-4CD3-915B-4F4F0B21A2E6}"/>
               </a:ext>
             </a:extLst>
           </p:cNvPr>
@@ -2026,7 +2026,7 @@
           <p:cNvPr id="7" name="Content-Placeholder-15-8">
             <a:extLst xmlns:a="http://schemas.openxmlformats.org/drawingml/2006/main">
               <a:ext uri="{FF2B5EF4-FFF2-40B4-BE49-F238E27FC236}">
-                <a16:creationId xmlns:a16="http://schemas.microsoft.com/office/drawing/2014/main" id="{392784A7-5334-4C86-B8C3-96CCDB0763AE}"/>
+                <a16:creationId xmlns:a16="http://schemas.microsoft.com/office/drawing/2014/main" id="{E4A9BE42-9720-4956-A3DD-1C9A32CC89B1}"/>
               </a:ext>
             </a:extLst>
           </p:cNvPr>
@@ -2071,7 +2071,7 @@
           <p:cNvPr id="8" name="Content-Placeholder-15-9">
             <a:extLst xmlns:a="http://schemas.openxmlformats.org/drawingml/2006/main">
               <a:ext uri="{FF2B5EF4-FFF2-40B4-BE49-F238E27FC236}">
-                <a16:creationId xmlns:a16="http://schemas.microsoft.com/office/drawing/2014/main" id="{1D6FBB73-204D-48CC-B467-EA7ED57C2192}"/>
+                <a16:creationId xmlns:a16="http://schemas.microsoft.com/office/drawing/2014/main" id="{83842DA1-BF73-478A-A8C6-FF09048C51FA}"/>
               </a:ext>
             </a:extLst>
           </p:cNvPr>
@@ -2116,7 +2116,7 @@
           <p:cNvPr id="9" name="Content-Placeholder-15-10">
             <a:extLst xmlns:a="http://schemas.openxmlformats.org/drawingml/2006/main">
               <a:ext uri="{FF2B5EF4-FFF2-40B4-BE49-F238E27FC236}">
-                <a16:creationId xmlns:a16="http://schemas.microsoft.com/office/drawing/2014/main" id="{89EB6A49-2957-4CA0-A5C0-0555CAB6498C}"/>
+                <a16:creationId xmlns:a16="http://schemas.microsoft.com/office/drawing/2014/main" id="{6DEC762B-CAAD-43FD-8C02-E0242E6DC55A}"/>
               </a:ext>
             </a:extLst>
           </p:cNvPr>
@@ -2161,7 +2161,7 @@
           <p:cNvPr id="10" name="Text-Placeholder-16-11">
             <a:extLst xmlns:a="http://schemas.openxmlformats.org/drawingml/2006/main">
               <a:ext uri="{FF2B5EF4-FFF2-40B4-BE49-F238E27FC236}">
-                <a16:creationId xmlns:a16="http://schemas.microsoft.com/office/drawing/2014/main" id="{1A74DFAD-00C2-4A10-9485-6C510F9431D8}"/>
+                <a16:creationId xmlns:a16="http://schemas.microsoft.com/office/drawing/2014/main" id="{A7CE3B35-3691-4CDC-939A-22AE7C15E4C7}"/>
               </a:ext>
             </a:extLst>
           </p:cNvPr>
@@ -2222,7 +2222,7 @@
           <p:cNvPr id="11" name="Text-Placeholder-16-12">
             <a:extLst xmlns:a="http://schemas.openxmlformats.org/drawingml/2006/main">
               <a:ext uri="{FF2B5EF4-FFF2-40B4-BE49-F238E27FC236}">
-                <a16:creationId xmlns:a16="http://schemas.microsoft.com/office/drawing/2014/main" id="{35554171-B4C8-4302-AD9D-6DBE39C04DC7}"/>
+                <a16:creationId xmlns:a16="http://schemas.microsoft.com/office/drawing/2014/main" id="{AAA77DE9-3106-454A-9321-32E39C4CDF83}"/>
               </a:ext>
             </a:extLst>
           </p:cNvPr>
@@ -2283,7 +2283,7 @@
           <p:cNvPr id="12" name="Text-Placeholder-16-13">
             <a:extLst xmlns:a="http://schemas.openxmlformats.org/drawingml/2006/main">
               <a:ext uri="{FF2B5EF4-FFF2-40B4-BE49-F238E27FC236}">
-                <a16:creationId xmlns:a16="http://schemas.microsoft.com/office/drawing/2014/main" id="{071EFC8A-9DA4-448C-A8B2-F7D995F4B171}"/>
+                <a16:creationId xmlns:a16="http://schemas.microsoft.com/office/drawing/2014/main" id="{5356EBD8-A92A-4E55-9944-A62C296CFC27}"/>
               </a:ext>
             </a:extLst>
           </p:cNvPr>
@@ -2342,7 +2342,7 @@
     </p:spTree>
     <p:extLst>
       <p:ext uri="{BB962C8B-B14F-4D97-AF65-F5344CB8AC3E}">
-        <p14:creationId xmlns:p14="http://schemas.microsoft.com/office/powerpoint/2010/main" val="1148143318"/>
+        <p14:creationId xmlns:p14="http://schemas.microsoft.com/office/powerpoint/2010/main" val="1524769871"/>
       </p:ext>
     </p:extLst>
   </p:cSld>
@@ -2366,7 +2366,7 @@
           <p:cNvPr id="6" name="Google-Shape-532-p58-2">
             <a:extLst xmlns:a="http://schemas.openxmlformats.org/drawingml/2006/main">
               <a:ext uri="{FF2B5EF4-FFF2-40B4-BE49-F238E27FC236}">
-                <a16:creationId xmlns:a16="http://schemas.microsoft.com/office/drawing/2014/main" id="{56B95559-0B64-47E9-A317-2B302C80CDAD}"/>
+                <a16:creationId xmlns:a16="http://schemas.microsoft.com/office/drawing/2014/main" id="{BC6DAD36-4478-4611-A9CA-6B1F3DF9DC0B}"/>
               </a:ext>
             </a:extLst>
           </p:cNvPr>
@@ -2411,7 +2411,7 @@
           <p:cNvPr id="2" name="Google-Shape-533-p58-3">
             <a:extLst xmlns:a="http://schemas.openxmlformats.org/drawingml/2006/main">
               <a:ext uri="{FF2B5EF4-FFF2-40B4-BE49-F238E27FC236}">
-                <a16:creationId xmlns:a16="http://schemas.microsoft.com/office/drawing/2014/main" id="{2E082ABB-DCA0-438A-87D9-FFA9D755B4B0}"/>
+                <a16:creationId xmlns:a16="http://schemas.microsoft.com/office/drawing/2014/main" id="{41B75822-444F-40A9-AC94-F151C22CB313}"/>
               </a:ext>
             </a:extLst>
           </p:cNvPr>
@@ -2456,7 +2456,7 @@
           <p:cNvPr id="3" name="Google-Shape-534-p58-4">
             <a:extLst xmlns:a="http://schemas.openxmlformats.org/drawingml/2006/main">
               <a:ext uri="{FF2B5EF4-FFF2-40B4-BE49-F238E27FC236}">
-                <a16:creationId xmlns:a16="http://schemas.microsoft.com/office/drawing/2014/main" id="{5DBEE709-9007-49AB-88BC-187AFFA6D3CB}"/>
+                <a16:creationId xmlns:a16="http://schemas.microsoft.com/office/drawing/2014/main" id="{5A5B09B6-E06F-48CD-8B7D-B1D3E663EFDE}"/>
               </a:ext>
             </a:extLst>
           </p:cNvPr>
@@ -2517,7 +2517,7 @@
           <p:cNvPr id="4" name="Content-Placeholder-1-5">
             <a:extLst xmlns:a="http://schemas.openxmlformats.org/drawingml/2006/main">
               <a:ext uri="{FF2B5EF4-FFF2-40B4-BE49-F238E27FC236}">
-                <a16:creationId xmlns:a16="http://schemas.microsoft.com/office/drawing/2014/main" id="{1845F879-9A7C-4D7E-B1FE-BD79A3D9032B}"/>
+                <a16:creationId xmlns:a16="http://schemas.microsoft.com/office/drawing/2014/main" id="{A6C6CDF4-CCD1-4E0A-B0A3-8CE43A7A27F9}"/>
               </a:ext>
             </a:extLst>
           </p:cNvPr>
@@ -2578,7 +2578,7 @@
           <p:cNvPr id="5" name="Content-Placeholder-2-6">
             <a:extLst xmlns:a="http://schemas.openxmlformats.org/drawingml/2006/main">
               <a:ext uri="{FF2B5EF4-FFF2-40B4-BE49-F238E27FC236}">
-                <a16:creationId xmlns:a16="http://schemas.microsoft.com/office/drawing/2014/main" id="{5ADB1481-B19A-45C4-B911-5A94031B0BF8}"/>
+                <a16:creationId xmlns:a16="http://schemas.microsoft.com/office/drawing/2014/main" id="{35225F5F-D11F-4911-9038-93DD39E859C7}"/>
               </a:ext>
             </a:extLst>
           </p:cNvPr>
@@ -2637,7 +2637,7 @@
     </p:spTree>
     <p:extLst>
       <p:ext uri="{BB962C8B-B14F-4D97-AF65-F5344CB8AC3E}">
-        <p14:creationId xmlns:p14="http://schemas.microsoft.com/office/powerpoint/2010/main" val="1370697126"/>
+        <p14:creationId xmlns:p14="http://schemas.microsoft.com/office/powerpoint/2010/main" val="1202696742"/>
       </p:ext>
     </p:extLst>
   </p:cSld>
@@ -2661,7 +2661,7 @@
           <p:cNvPr id="13" name="Rounded-Rectangle-5-1">
             <a:extLst xmlns:a="http://schemas.openxmlformats.org/drawingml/2006/main">
               <a:ext uri="{FF2B5EF4-FFF2-40B4-BE49-F238E27FC236}">
-                <a16:creationId xmlns:a16="http://schemas.microsoft.com/office/drawing/2014/main" id="{2605E7E8-5692-4251-A2D1-BD9A75129800}"/>
+                <a16:creationId xmlns:a16="http://schemas.microsoft.com/office/drawing/2014/main" id="{E6575A08-AAA1-4C28-8049-8236AF6CA31B}"/>
               </a:ext>
             </a:extLst>
           </p:cNvPr>
@@ -2690,7 +2690,7 @@
           <p:cNvPr id="2" name="Rounded-Rectangle-6-2">
             <a:extLst xmlns:a="http://schemas.openxmlformats.org/drawingml/2006/main">
               <a:ext uri="{FF2B5EF4-FFF2-40B4-BE49-F238E27FC236}">
-                <a16:creationId xmlns:a16="http://schemas.microsoft.com/office/drawing/2014/main" id="{CE0F6F04-2CCA-475D-A778-3C1CACBE5667}"/>
+                <a16:creationId xmlns:a16="http://schemas.microsoft.com/office/drawing/2014/main" id="{01BD28D3-BD78-42E8-B2DC-DBC7ABE3532F}"/>
               </a:ext>
             </a:extLst>
           </p:cNvPr>
@@ -2719,7 +2719,7 @@
           <p:cNvPr id="3" name="Rounded-Rectangle-7-3">
             <a:extLst xmlns:a="http://schemas.openxmlformats.org/drawingml/2006/main">
               <a:ext uri="{FF2B5EF4-FFF2-40B4-BE49-F238E27FC236}">
-                <a16:creationId xmlns:a16="http://schemas.microsoft.com/office/drawing/2014/main" id="{A1250832-AC8F-4A07-B3F9-01AFCF4E5118}"/>
+                <a16:creationId xmlns:a16="http://schemas.microsoft.com/office/drawing/2014/main" id="{1C3BF840-DF34-4E40-BEA3-BEDF6F522D47}"/>
               </a:ext>
             </a:extLst>
           </p:cNvPr>
@@ -2748,7 +2748,7 @@
           <p:cNvPr id="4" name="Slide-Number-Placeholder-1-4">
             <a:extLst xmlns:a="http://schemas.openxmlformats.org/drawingml/2006/main">
               <a:ext uri="{FF2B5EF4-FFF2-40B4-BE49-F238E27FC236}">
-                <a16:creationId xmlns:a16="http://schemas.microsoft.com/office/drawing/2014/main" id="{4B4963AE-2900-42DB-A659-A88C0CB21180}"/>
+                <a16:creationId xmlns:a16="http://schemas.microsoft.com/office/drawing/2014/main" id="{99900B72-2279-46DB-BB8D-0B3888DED3EC}"/>
               </a:ext>
             </a:extLst>
           </p:cNvPr>
@@ -2791,7 +2791,7 @@
           <p:cNvPr id="5" name="Title-2-5">
             <a:extLst xmlns:a="http://schemas.openxmlformats.org/drawingml/2006/main">
               <a:ext uri="{FF2B5EF4-FFF2-40B4-BE49-F238E27FC236}">
-                <a16:creationId xmlns:a16="http://schemas.microsoft.com/office/drawing/2014/main" id="{B809FC1F-5BAD-4526-B8E3-C994B7843BCC}"/>
+                <a16:creationId xmlns:a16="http://schemas.microsoft.com/office/drawing/2014/main" id="{88DB0B51-3DC0-479C-A63F-17329E6F339F}"/>
               </a:ext>
             </a:extLst>
           </p:cNvPr>
@@ -2836,7 +2836,7 @@
           <p:cNvPr id="6" name="Content-Placeholder-9-6">
             <a:extLst xmlns:a="http://schemas.openxmlformats.org/drawingml/2006/main">
               <a:ext uri="{FF2B5EF4-FFF2-40B4-BE49-F238E27FC236}">
-                <a16:creationId xmlns:a16="http://schemas.microsoft.com/office/drawing/2014/main" id="{82ADEE1C-E9B4-4F2A-968C-58226E5D585E}"/>
+                <a16:creationId xmlns:a16="http://schemas.microsoft.com/office/drawing/2014/main" id="{4B044454-A42C-4B7F-91D5-C173882EBA15}"/>
               </a:ext>
             </a:extLst>
           </p:cNvPr>
@@ -2882,7 +2882,7 @@
           <p:cNvPr id="7" name="Content-Placeholder-10-7">
             <a:extLst xmlns:a="http://schemas.openxmlformats.org/drawingml/2006/main">
               <a:ext uri="{FF2B5EF4-FFF2-40B4-BE49-F238E27FC236}">
-                <a16:creationId xmlns:a16="http://schemas.microsoft.com/office/drawing/2014/main" id="{F7FFF635-1DCA-4208-A4EB-496A711469DB}"/>
+                <a16:creationId xmlns:a16="http://schemas.microsoft.com/office/drawing/2014/main" id="{231E5A9F-E86D-496B-B26D-3B7D6B21BE8F}"/>
               </a:ext>
             </a:extLst>
           </p:cNvPr>
@@ -2928,7 +2928,7 @@
           <p:cNvPr id="8" name="Content-Placeholder-11-8">
             <a:extLst xmlns:a="http://schemas.openxmlformats.org/drawingml/2006/main">
               <a:ext uri="{FF2B5EF4-FFF2-40B4-BE49-F238E27FC236}">
-                <a16:creationId xmlns:a16="http://schemas.microsoft.com/office/drawing/2014/main" id="{499D3D99-8FDA-4ED2-9E2D-73839D95BD2B}"/>
+                <a16:creationId xmlns:a16="http://schemas.microsoft.com/office/drawing/2014/main" id="{F919A1E8-3438-41D9-80D4-455E3A037446}"/>
               </a:ext>
             </a:extLst>
           </p:cNvPr>
@@ -2974,7 +2974,7 @@
           <p:cNvPr id="9" name="Content-Placeholder-9-9">
             <a:extLst xmlns:a="http://schemas.openxmlformats.org/drawingml/2006/main">
               <a:ext uri="{FF2B5EF4-FFF2-40B4-BE49-F238E27FC236}">
-                <a16:creationId xmlns:a16="http://schemas.microsoft.com/office/drawing/2014/main" id="{2A3E720A-D21F-4386-BA70-834D523F52CA}"/>
+                <a16:creationId xmlns:a16="http://schemas.microsoft.com/office/drawing/2014/main" id="{C57EBA64-E145-4CD7-8DA1-6905FFE06260}"/>
               </a:ext>
             </a:extLst>
           </p:cNvPr>
@@ -3019,7 +3019,7 @@
           <p:cNvPr id="10" name="Content-Placeholder-9-10">
             <a:extLst xmlns:a="http://schemas.openxmlformats.org/drawingml/2006/main">
               <a:ext uri="{FF2B5EF4-FFF2-40B4-BE49-F238E27FC236}">
-                <a16:creationId xmlns:a16="http://schemas.microsoft.com/office/drawing/2014/main" id="{55D57C98-1DC3-4710-926B-D0F37A64B6E5}"/>
+                <a16:creationId xmlns:a16="http://schemas.microsoft.com/office/drawing/2014/main" id="{8F1C4BEE-BC9D-4A06-8FE4-EEFD1C8BC525}"/>
               </a:ext>
             </a:extLst>
           </p:cNvPr>
@@ -3064,7 +3064,7 @@
           <p:cNvPr id="11" name="Content-Placeholder-9-11">
             <a:extLst xmlns:a="http://schemas.openxmlformats.org/drawingml/2006/main">
               <a:ext uri="{FF2B5EF4-FFF2-40B4-BE49-F238E27FC236}">
-                <a16:creationId xmlns:a16="http://schemas.microsoft.com/office/drawing/2014/main" id="{6251AE12-59B0-4579-9106-2EFC641C94BD}"/>
+                <a16:creationId xmlns:a16="http://schemas.microsoft.com/office/drawing/2014/main" id="{E8B43687-F8DE-4C68-9494-8A96B1F72E04}"/>
               </a:ext>
             </a:extLst>
           </p:cNvPr>
@@ -3109,7 +3109,7 @@
           <p:cNvPr id="12" name="Content-Placeholder-15-12">
             <a:extLst xmlns:a="http://schemas.openxmlformats.org/drawingml/2006/main">
               <a:ext uri="{FF2B5EF4-FFF2-40B4-BE49-F238E27FC236}">
-                <a16:creationId xmlns:a16="http://schemas.microsoft.com/office/drawing/2014/main" id="{7054FB36-1F93-4E33-AE9F-F747CDB35066}"/>
+                <a16:creationId xmlns:a16="http://schemas.microsoft.com/office/drawing/2014/main" id="{37E9D2BE-F2A5-40A5-8A3F-F3EA207327E8}"/>
               </a:ext>
             </a:extLst>
           </p:cNvPr>
@@ -3167,7 +3167,7 @@
     </p:spTree>
     <p:extLst>
       <p:ext uri="{BB962C8B-B14F-4D97-AF65-F5344CB8AC3E}">
-        <p14:creationId xmlns:p14="http://schemas.microsoft.com/office/powerpoint/2010/main" val="271470603"/>
+        <p14:creationId xmlns:p14="http://schemas.microsoft.com/office/powerpoint/2010/main" val="1714425590"/>
       </p:ext>
     </p:extLst>
   </p:cSld>
@@ -3191,7 +3191,7 @@
           <p:cNvPr id="13" name="Slide-Number-Placeholder-3-2">
             <a:extLst xmlns:a="http://schemas.openxmlformats.org/drawingml/2006/main">
               <a:ext uri="{FF2B5EF4-FFF2-40B4-BE49-F238E27FC236}">
-                <a16:creationId xmlns:a16="http://schemas.microsoft.com/office/drawing/2014/main" id="{A6B25416-87A1-446D-8397-4DE76008A689}"/>
+                <a16:creationId xmlns:a16="http://schemas.microsoft.com/office/drawing/2014/main" id="{160DF2C8-0CC4-403D-B740-F02BA6D70AC6}"/>
               </a:ext>
             </a:extLst>
           </p:cNvPr>
@@ -3234,7 +3234,7 @@
           <p:cNvPr id="2" name="Title-10-3">
             <a:extLst xmlns:a="http://schemas.openxmlformats.org/drawingml/2006/main">
               <a:ext uri="{FF2B5EF4-FFF2-40B4-BE49-F238E27FC236}">
-                <a16:creationId xmlns:a16="http://schemas.microsoft.com/office/drawing/2014/main" id="{3173FED7-E954-4DFA-AB8A-E007F42B1A8F}"/>
+                <a16:creationId xmlns:a16="http://schemas.microsoft.com/office/drawing/2014/main" id="{2EA32765-3E5C-45F6-B084-1357129B47CD}"/>
               </a:ext>
             </a:extLst>
           </p:cNvPr>
@@ -3301,7 +3301,7 @@
           <p:cNvPr id="4" name="Google-Shape-2260-p159-5">
             <a:extLst xmlns:a="http://schemas.openxmlformats.org/drawingml/2006/main">
               <a:ext uri="{FF2B5EF4-FFF2-40B4-BE49-F238E27FC236}">
-                <a16:creationId xmlns:a16="http://schemas.microsoft.com/office/drawing/2014/main" id="{6A345BD1-69D4-46A3-8710-752D861721F9}"/>
+                <a16:creationId xmlns:a16="http://schemas.microsoft.com/office/drawing/2014/main" id="{20FC18F2-2BEE-4E48-9BC8-CB67A5EDE2D1}"/>
               </a:ext>
             </a:extLst>
           </p:cNvPr>
@@ -3328,7 +3328,7 @@
           <p:cNvPr id="5" name="Google-Shape-2261-p159-6">
             <a:extLst xmlns:a="http://schemas.openxmlformats.org/drawingml/2006/main">
               <a:ext uri="{FF2B5EF4-FFF2-40B4-BE49-F238E27FC236}">
-                <a16:creationId xmlns:a16="http://schemas.microsoft.com/office/drawing/2014/main" id="{C82E7E81-1C21-45ED-A8B2-0F5DF1AA095E}"/>
+                <a16:creationId xmlns:a16="http://schemas.microsoft.com/office/drawing/2014/main" id="{1D45ED21-B089-4C96-B326-8CEEB309D15D}"/>
               </a:ext>
             </a:extLst>
           </p:cNvPr>
@@ -3355,7 +3355,7 @@
           <p:cNvPr id="6" name="Google-Shape-2262-p159-7">
             <a:extLst xmlns:a="http://schemas.openxmlformats.org/drawingml/2006/main">
               <a:ext uri="{FF2B5EF4-FFF2-40B4-BE49-F238E27FC236}">
-                <a16:creationId xmlns:a16="http://schemas.microsoft.com/office/drawing/2014/main" id="{2D17B3CB-EADB-426E-B018-5667D81F1868}"/>
+                <a16:creationId xmlns:a16="http://schemas.microsoft.com/office/drawing/2014/main" id="{79D41582-BC8F-4EEB-B6CF-FD60F7658374}"/>
               </a:ext>
             </a:extLst>
           </p:cNvPr>
@@ -3382,7 +3382,7 @@
           <p:cNvPr id="7" name="Content-Placeholder-15-8">
             <a:extLst xmlns:a="http://schemas.openxmlformats.org/drawingml/2006/main">
               <a:ext uri="{FF2B5EF4-FFF2-40B4-BE49-F238E27FC236}">
-                <a16:creationId xmlns:a16="http://schemas.microsoft.com/office/drawing/2014/main" id="{3466F89D-2A00-46EB-8566-66559567FF0F}"/>
+                <a16:creationId xmlns:a16="http://schemas.microsoft.com/office/drawing/2014/main" id="{F58E6E33-5A9C-4C68-93DC-3E3A0419AC07}"/>
               </a:ext>
             </a:extLst>
           </p:cNvPr>
@@ -3427,7 +3427,7 @@
           <p:cNvPr id="8" name="Content-Placeholder-15-9">
             <a:extLst xmlns:a="http://schemas.openxmlformats.org/drawingml/2006/main">
               <a:ext uri="{FF2B5EF4-FFF2-40B4-BE49-F238E27FC236}">
-                <a16:creationId xmlns:a16="http://schemas.microsoft.com/office/drawing/2014/main" id="{387E721E-04AD-423C-BF9F-290EABC31252}"/>
+                <a16:creationId xmlns:a16="http://schemas.microsoft.com/office/drawing/2014/main" id="{AC0B6E79-D553-45B8-8A77-8D5F4719D111}"/>
               </a:ext>
             </a:extLst>
           </p:cNvPr>
@@ -3472,7 +3472,7 @@
           <p:cNvPr id="9" name="Content-Placeholder-15-10">
             <a:extLst xmlns:a="http://schemas.openxmlformats.org/drawingml/2006/main">
               <a:ext uri="{FF2B5EF4-FFF2-40B4-BE49-F238E27FC236}">
-                <a16:creationId xmlns:a16="http://schemas.microsoft.com/office/drawing/2014/main" id="{59EA9768-1BF6-49C1-B147-2B39454870A9}"/>
+                <a16:creationId xmlns:a16="http://schemas.microsoft.com/office/drawing/2014/main" id="{DD440580-BD22-42BD-B93C-D5C16C95A4E0}"/>
               </a:ext>
             </a:extLst>
           </p:cNvPr>
@@ -3517,7 +3517,7 @@
           <p:cNvPr id="10" name="Text-Placeholder-16-11">
             <a:extLst xmlns:a="http://schemas.openxmlformats.org/drawingml/2006/main">
               <a:ext uri="{FF2B5EF4-FFF2-40B4-BE49-F238E27FC236}">
-                <a16:creationId xmlns:a16="http://schemas.microsoft.com/office/drawing/2014/main" id="{3F93826E-862C-4073-947D-3A30C230A9C8}"/>
+                <a16:creationId xmlns:a16="http://schemas.microsoft.com/office/drawing/2014/main" id="{481BA29D-C2DA-4319-B3DC-31DACB9B77F6}"/>
               </a:ext>
             </a:extLst>
           </p:cNvPr>
@@ -3578,7 +3578,7 @@
           <p:cNvPr id="11" name="Text-Placeholder-16-12">
             <a:extLst xmlns:a="http://schemas.openxmlformats.org/drawingml/2006/main">
               <a:ext uri="{FF2B5EF4-FFF2-40B4-BE49-F238E27FC236}">
-                <a16:creationId xmlns:a16="http://schemas.microsoft.com/office/drawing/2014/main" id="{B1AE078E-3E4B-496A-A9C2-F22C4F443B97}"/>
+                <a16:creationId xmlns:a16="http://schemas.microsoft.com/office/drawing/2014/main" id="{200908B8-7980-4F7A-B591-B35AC955A85E}"/>
               </a:ext>
             </a:extLst>
           </p:cNvPr>
@@ -3639,7 +3639,7 @@
           <p:cNvPr id="12" name="Text-Placeholder-16-13">
             <a:extLst xmlns:a="http://schemas.openxmlformats.org/drawingml/2006/main">
               <a:ext uri="{FF2B5EF4-FFF2-40B4-BE49-F238E27FC236}">
-                <a16:creationId xmlns:a16="http://schemas.microsoft.com/office/drawing/2014/main" id="{06946A00-A3D4-4921-AB94-4DD39798DC5C}"/>
+                <a16:creationId xmlns:a16="http://schemas.microsoft.com/office/drawing/2014/main" id="{F5B54342-225E-4435-83B6-743F094A8D3A}"/>
               </a:ext>
             </a:extLst>
           </p:cNvPr>
@@ -3698,7 +3698,7 @@
     </p:spTree>
     <p:extLst>
       <p:ext uri="{BB962C8B-B14F-4D97-AF65-F5344CB8AC3E}">
-        <p14:creationId xmlns:p14="http://schemas.microsoft.com/office/powerpoint/2010/main" val="120977293"/>
+        <p14:creationId xmlns:p14="http://schemas.microsoft.com/office/powerpoint/2010/main" val="878506539"/>
       </p:ext>
     </p:extLst>
   </p:cSld>
@@ -3722,7 +3722,7 @@
           <p:cNvPr id="6" name="Google-Shape-532-p58-2">
             <a:extLst xmlns:a="http://schemas.openxmlformats.org/drawingml/2006/main">
               <a:ext uri="{FF2B5EF4-FFF2-40B4-BE49-F238E27FC236}">
-                <a16:creationId xmlns:a16="http://schemas.microsoft.com/office/drawing/2014/main" id="{2FF104AE-18E2-4ECE-876E-7F0AAAADA0B7}"/>
+                <a16:creationId xmlns:a16="http://schemas.microsoft.com/office/drawing/2014/main" id="{1B7690CB-3002-4F60-A736-CEA63442B899}"/>
               </a:ext>
             </a:extLst>
           </p:cNvPr>
@@ -3767,7 +3767,7 @@
           <p:cNvPr id="2" name="Google-Shape-533-p58-3">
             <a:extLst xmlns:a="http://schemas.openxmlformats.org/drawingml/2006/main">
               <a:ext uri="{FF2B5EF4-FFF2-40B4-BE49-F238E27FC236}">
-                <a16:creationId xmlns:a16="http://schemas.microsoft.com/office/drawing/2014/main" id="{62EBE93F-7A5B-4A5E-85C9-7B292560863A}"/>
+                <a16:creationId xmlns:a16="http://schemas.microsoft.com/office/drawing/2014/main" id="{D56F5357-2454-4F8A-B542-2626CEC21CC5}"/>
               </a:ext>
             </a:extLst>
           </p:cNvPr>
@@ -3812,7 +3812,7 @@
           <p:cNvPr id="3" name="Google-Shape-534-p58-4">
             <a:extLst xmlns:a="http://schemas.openxmlformats.org/drawingml/2006/main">
               <a:ext uri="{FF2B5EF4-FFF2-40B4-BE49-F238E27FC236}">
-                <a16:creationId xmlns:a16="http://schemas.microsoft.com/office/drawing/2014/main" id="{9F5146C5-900F-4CCC-BDF4-016A55022709}"/>
+                <a16:creationId xmlns:a16="http://schemas.microsoft.com/office/drawing/2014/main" id="{071CE833-006E-4E8D-9815-51BDC4FB1DD1}"/>
               </a:ext>
             </a:extLst>
           </p:cNvPr>
@@ -3873,7 +3873,7 @@
           <p:cNvPr id="4" name="Content-Placeholder-1-5">
             <a:extLst xmlns:a="http://schemas.openxmlformats.org/drawingml/2006/main">
               <a:ext uri="{FF2B5EF4-FFF2-40B4-BE49-F238E27FC236}">
-                <a16:creationId xmlns:a16="http://schemas.microsoft.com/office/drawing/2014/main" id="{1B91F01C-EC9A-4629-A0C5-BE7DA947A355}"/>
+                <a16:creationId xmlns:a16="http://schemas.microsoft.com/office/drawing/2014/main" id="{7D1DBF39-5756-48D3-842F-84A29892FEC2}"/>
               </a:ext>
             </a:extLst>
           </p:cNvPr>
@@ -3934,7 +3934,7 @@
           <p:cNvPr id="5" name="Content-Placeholder-2-6">
             <a:extLst xmlns:a="http://schemas.openxmlformats.org/drawingml/2006/main">
               <a:ext uri="{FF2B5EF4-FFF2-40B4-BE49-F238E27FC236}">
-                <a16:creationId xmlns:a16="http://schemas.microsoft.com/office/drawing/2014/main" id="{22FC8F39-0528-4E7C-93DD-0FFD750DE3FE}"/>
+                <a16:creationId xmlns:a16="http://schemas.microsoft.com/office/drawing/2014/main" id="{8C6BB33D-E22A-4701-ABD3-FF2D756BEA7B}"/>
               </a:ext>
             </a:extLst>
           </p:cNvPr>
@@ -3993,7 +3993,7 @@
     </p:spTree>
     <p:extLst>
       <p:ext uri="{BB962C8B-B14F-4D97-AF65-F5344CB8AC3E}">
-        <p14:creationId xmlns:p14="http://schemas.microsoft.com/office/powerpoint/2010/main" val="172321594"/>
+        <p14:creationId xmlns:p14="http://schemas.microsoft.com/office/powerpoint/2010/main" val="1324341816"/>
       </p:ext>
     </p:extLst>
   </p:cSld>
@@ -4017,7 +4017,7 @@
           <p:cNvPr id="13" name="Slide-Number-Placeholder-3-2">
             <a:extLst xmlns:a="http://schemas.openxmlformats.org/drawingml/2006/main">
               <a:ext uri="{FF2B5EF4-FFF2-40B4-BE49-F238E27FC236}">
-                <a16:creationId xmlns:a16="http://schemas.microsoft.com/office/drawing/2014/main" id="{DAF7C0CF-3216-4A8E-9985-FB5E6130843F}"/>
+                <a16:creationId xmlns:a16="http://schemas.microsoft.com/office/drawing/2014/main" id="{A9803BE6-2707-48D6-A1B7-4892C5C9FB92}"/>
               </a:ext>
             </a:extLst>
           </p:cNvPr>
@@ -4060,7 +4060,7 @@
           <p:cNvPr id="2" name="Title-10-3">
             <a:extLst xmlns:a="http://schemas.openxmlformats.org/drawingml/2006/main">
               <a:ext uri="{FF2B5EF4-FFF2-40B4-BE49-F238E27FC236}">
-                <a16:creationId xmlns:a16="http://schemas.microsoft.com/office/drawing/2014/main" id="{CC4E4B15-F7B6-4A71-944C-0BC0C734E338}"/>
+                <a16:creationId xmlns:a16="http://schemas.microsoft.com/office/drawing/2014/main" id="{03B2C6D9-1350-41D4-B7EC-5437EAFF1A97}"/>
               </a:ext>
             </a:extLst>
           </p:cNvPr>
@@ -4127,7 +4127,7 @@
           <p:cNvPr id="4" name="Google-Shape-2260-p159-5">
             <a:extLst xmlns:a="http://schemas.openxmlformats.org/drawingml/2006/main">
               <a:ext uri="{FF2B5EF4-FFF2-40B4-BE49-F238E27FC236}">
-                <a16:creationId xmlns:a16="http://schemas.microsoft.com/office/drawing/2014/main" id="{49F5CBC4-0F38-4788-A00D-82167EFE13EE}"/>
+                <a16:creationId xmlns:a16="http://schemas.microsoft.com/office/drawing/2014/main" id="{94A77997-C517-4487-8982-41892CDC6866}"/>
               </a:ext>
             </a:extLst>
           </p:cNvPr>
@@ -4154,7 +4154,7 @@
           <p:cNvPr id="5" name="Google-Shape-2261-p159-6">
             <a:extLst xmlns:a="http://schemas.openxmlformats.org/drawingml/2006/main">
               <a:ext uri="{FF2B5EF4-FFF2-40B4-BE49-F238E27FC236}">
-                <a16:creationId xmlns:a16="http://schemas.microsoft.com/office/drawing/2014/main" id="{EF387910-1ABE-4E49-AE59-E47CDA6C8E50}"/>
+                <a16:creationId xmlns:a16="http://schemas.microsoft.com/office/drawing/2014/main" id="{86BB64BF-075A-4B80-8D1D-5DFBDB624B36}"/>
               </a:ext>
             </a:extLst>
           </p:cNvPr>
@@ -4181,7 +4181,7 @@
           <p:cNvPr id="6" name="Google-Shape-2262-p159-7">
             <a:extLst xmlns:a="http://schemas.openxmlformats.org/drawingml/2006/main">
               <a:ext uri="{FF2B5EF4-FFF2-40B4-BE49-F238E27FC236}">
-                <a16:creationId xmlns:a16="http://schemas.microsoft.com/office/drawing/2014/main" id="{D5D237B2-41EC-4345-A7EA-DF8387789B45}"/>
+                <a16:creationId xmlns:a16="http://schemas.microsoft.com/office/drawing/2014/main" id="{26306121-D30C-4E5E-9D73-6B1D2D9F11BA}"/>
               </a:ext>
             </a:extLst>
           </p:cNvPr>
@@ -4208,7 +4208,7 @@
           <p:cNvPr id="7" name="Content-Placeholder-15-8">
             <a:extLst xmlns:a="http://schemas.openxmlformats.org/drawingml/2006/main">
               <a:ext uri="{FF2B5EF4-FFF2-40B4-BE49-F238E27FC236}">
-                <a16:creationId xmlns:a16="http://schemas.microsoft.com/office/drawing/2014/main" id="{546E742C-BA5C-4943-AA76-9AB39622950F}"/>
+                <a16:creationId xmlns:a16="http://schemas.microsoft.com/office/drawing/2014/main" id="{FC30B5D6-BCB5-4DE8-8916-03E926D18191}"/>
               </a:ext>
             </a:extLst>
           </p:cNvPr>
@@ -4253,7 +4253,7 @@
           <p:cNvPr id="8" name="Content-Placeholder-15-9">
             <a:extLst xmlns:a="http://schemas.openxmlformats.org/drawingml/2006/main">
               <a:ext uri="{FF2B5EF4-FFF2-40B4-BE49-F238E27FC236}">
-                <a16:creationId xmlns:a16="http://schemas.microsoft.com/office/drawing/2014/main" id="{F39E8105-35F1-4A1F-9DEC-DB9E2879B5D7}"/>
+                <a16:creationId xmlns:a16="http://schemas.microsoft.com/office/drawing/2014/main" id="{D6E88CF4-1CA0-4243-A798-C383803FED13}"/>
               </a:ext>
             </a:extLst>
           </p:cNvPr>
@@ -4298,7 +4298,7 @@
           <p:cNvPr id="9" name="Content-Placeholder-15-10">
             <a:extLst xmlns:a="http://schemas.openxmlformats.org/drawingml/2006/main">
               <a:ext uri="{FF2B5EF4-FFF2-40B4-BE49-F238E27FC236}">
-                <a16:creationId xmlns:a16="http://schemas.microsoft.com/office/drawing/2014/main" id="{FBFC1EAE-D8C3-4BEE-940B-E19A97EF9A77}"/>
+                <a16:creationId xmlns:a16="http://schemas.microsoft.com/office/drawing/2014/main" id="{CBFDEDF0-492F-4A9D-A29A-38BF927315B8}"/>
               </a:ext>
             </a:extLst>
           </p:cNvPr>
@@ -4343,7 +4343,7 @@
           <p:cNvPr id="10" name="Text-Placeholder-16-11">
             <a:extLst xmlns:a="http://schemas.openxmlformats.org/drawingml/2006/main">
               <a:ext uri="{FF2B5EF4-FFF2-40B4-BE49-F238E27FC236}">
-                <a16:creationId xmlns:a16="http://schemas.microsoft.com/office/drawing/2014/main" id="{55B32E5D-04DA-431A-BD44-F17B61D7817E}"/>
+                <a16:creationId xmlns:a16="http://schemas.microsoft.com/office/drawing/2014/main" id="{A46006C9-D183-4529-9DBE-E39F26F5A204}"/>
               </a:ext>
             </a:extLst>
           </p:cNvPr>
@@ -4404,7 +4404,7 @@
           <p:cNvPr id="11" name="Text-Placeholder-16-12">
             <a:extLst xmlns:a="http://schemas.openxmlformats.org/drawingml/2006/main">
               <a:ext uri="{FF2B5EF4-FFF2-40B4-BE49-F238E27FC236}">
-                <a16:creationId xmlns:a16="http://schemas.microsoft.com/office/drawing/2014/main" id="{726507AC-8637-4394-BF7B-25B547F02DAC}"/>
+                <a16:creationId xmlns:a16="http://schemas.microsoft.com/office/drawing/2014/main" id="{947DF48A-E68F-4BB7-8913-5309ACFE81F8}"/>
               </a:ext>
             </a:extLst>
           </p:cNvPr>
@@ -4465,7 +4465,7 @@
           <p:cNvPr id="12" name="Text-Placeholder-16-13">
             <a:extLst xmlns:a="http://schemas.openxmlformats.org/drawingml/2006/main">
               <a:ext uri="{FF2B5EF4-FFF2-40B4-BE49-F238E27FC236}">
-                <a16:creationId xmlns:a16="http://schemas.microsoft.com/office/drawing/2014/main" id="{81FA7483-F069-4811-8AFC-6C073CAF1EA8}"/>
+                <a16:creationId xmlns:a16="http://schemas.microsoft.com/office/drawing/2014/main" id="{C802DDD3-4A49-42C0-AE96-9C30CF5BD7EF}"/>
               </a:ext>
             </a:extLst>
           </p:cNvPr>
@@ -4524,7 +4524,7 @@
     </p:spTree>
     <p:extLst>
       <p:ext uri="{BB962C8B-B14F-4D97-AF65-F5344CB8AC3E}">
-        <p14:creationId xmlns:p14="http://schemas.microsoft.com/office/powerpoint/2010/main" val="1932786171"/>
+        <p14:creationId xmlns:p14="http://schemas.microsoft.com/office/powerpoint/2010/main" val="449866176"/>
       </p:ext>
     </p:extLst>
   </p:cSld>
@@ -4548,7 +4548,7 @@
           <p:cNvPr id="4" name="Title-3-1">
             <a:extLst xmlns:a="http://schemas.openxmlformats.org/drawingml/2006/main">
               <a:ext uri="{FF2B5EF4-FFF2-40B4-BE49-F238E27FC236}">
-                <a16:creationId xmlns:a16="http://schemas.microsoft.com/office/drawing/2014/main" id="{23CBC6BF-DD77-4288-AE53-C52DD8201B63}"/>
+                <a16:creationId xmlns:a16="http://schemas.microsoft.com/office/drawing/2014/main" id="{467E9693-851F-4760-8265-139BFBDDCF33}"/>
               </a:ext>
             </a:extLst>
           </p:cNvPr>
@@ -4584,7 +4584,7 @@
             </a:pPr>
             <a:r>
               <a:t>품질·보안·E2E 검증
-D1 전 OpenAI ZDR·MAM 확인</a:t>
+OpenAI 확인 완료 · D0 유지</a:t>
             </a:r>
           </a:p>
         </p:txBody>
@@ -4594,7 +4594,7 @@
           <p:cNvPr id="2" name="Subtitle-4-2">
             <a:extLst xmlns:a="http://schemas.openxmlformats.org/drawingml/2006/main">
               <a:ext uri="{FF2B5EF4-FFF2-40B4-BE49-F238E27FC236}">
-                <a16:creationId xmlns:a16="http://schemas.microsoft.com/office/drawing/2014/main" id="{7E2C682F-D60C-40C2-9841-4B3D1246DAF1}"/>
+                <a16:creationId xmlns:a16="http://schemas.microsoft.com/office/drawing/2014/main" id="{FFD6ACFD-5763-4939-9397-CA6F25D0BBD0}"/>
               </a:ext>
             </a:extLst>
           </p:cNvPr>
@@ -4639,7 +4639,7 @@
           <p:cNvPr id="3" name="Subtitle-4-3">
             <a:extLst xmlns:a="http://schemas.openxmlformats.org/drawingml/2006/main">
               <a:ext uri="{FF2B5EF4-FFF2-40B4-BE49-F238E27FC236}">
-                <a16:creationId xmlns:a16="http://schemas.microsoft.com/office/drawing/2014/main" id="{CA7DB2D5-F68A-44A1-B567-FF6AB0B0ADE3}"/>
+                <a16:creationId xmlns:a16="http://schemas.microsoft.com/office/drawing/2014/main" id="{CFB8B269-2A0E-4660-B194-541D7976BC51}"/>
               </a:ext>
             </a:extLst>
           </p:cNvPr>
@@ -4682,7 +4682,7 @@
     </p:spTree>
     <p:extLst>
       <p:ext uri="{BB962C8B-B14F-4D97-AF65-F5344CB8AC3E}">
-        <p14:creationId xmlns:p14="http://schemas.microsoft.com/office/powerpoint/2010/main" val="44871159"/>
+        <p14:creationId xmlns:p14="http://schemas.microsoft.com/office/powerpoint/2010/main" val="215408561"/>
       </p:ext>
     </p:extLst>
   </p:cSld>
@@ -4706,7 +4706,7 @@
           <p:cNvPr id="4" name="Title-3-1">
             <a:extLst xmlns:a="http://schemas.openxmlformats.org/drawingml/2006/main">
               <a:ext uri="{FF2B5EF4-FFF2-40B4-BE49-F238E27FC236}">
-                <a16:creationId xmlns:a16="http://schemas.microsoft.com/office/drawing/2014/main" id="{1AE0E4AD-F50C-4710-88F3-F019CE54ABF6}"/>
+                <a16:creationId xmlns:a16="http://schemas.microsoft.com/office/drawing/2014/main" id="{EFEFD58E-4903-4761-88D7-3E5F7F4C1186}"/>
               </a:ext>
             </a:extLst>
           </p:cNvPr>
@@ -4751,7 +4751,7 @@
           <p:cNvPr id="2" name="Subtitle-4-2">
             <a:extLst xmlns:a="http://schemas.openxmlformats.org/drawingml/2006/main">
               <a:ext uri="{FF2B5EF4-FFF2-40B4-BE49-F238E27FC236}">
-                <a16:creationId xmlns:a16="http://schemas.microsoft.com/office/drawing/2014/main" id="{72AE741B-A84E-4D27-A549-697C0E795A8A}"/>
+                <a16:creationId xmlns:a16="http://schemas.microsoft.com/office/drawing/2014/main" id="{51286A79-FAEA-4EF5-BE0C-4B15715DCC87}"/>
               </a:ext>
             </a:extLst>
           </p:cNvPr>
@@ -4826,7 +4826,7 @@
           <p:cNvPr id="3" name="Subtitle-4-3">
             <a:extLst xmlns:a="http://schemas.openxmlformats.org/drawingml/2006/main">
               <a:ext uri="{FF2B5EF4-FFF2-40B4-BE49-F238E27FC236}">
-                <a16:creationId xmlns:a16="http://schemas.microsoft.com/office/drawing/2014/main" id="{80DE85AE-EC7A-4595-9D65-231ACB71BD20}"/>
+                <a16:creationId xmlns:a16="http://schemas.microsoft.com/office/drawing/2014/main" id="{A0FA959B-0DDD-497C-9A96-CE5F0F5B5958}"/>
               </a:ext>
             </a:extLst>
           </p:cNvPr>
@@ -4869,7 +4869,7 @@
     </p:spTree>
     <p:extLst>
       <p:ext uri="{BB962C8B-B14F-4D97-AF65-F5344CB8AC3E}">
-        <p14:creationId xmlns:p14="http://schemas.microsoft.com/office/powerpoint/2010/main" val="2060691477"/>
+        <p14:creationId xmlns:p14="http://schemas.microsoft.com/office/powerpoint/2010/main" val="516268049"/>
       </p:ext>
     </p:extLst>
   </p:cSld>

--- a/output/presentation/techflow-activepieces-rag-orchestration.pptx
+++ b/output/presentation/techflow-activepieces-rag-orchestration.pptx
@@ -2,21 +2,21 @@
 <file path=ppt/presentation.xml><?xml version="1.0" encoding="utf-8"?>
 <p:presentation xmlns:p="http://schemas.openxmlformats.org/presentationml/2006/main">
   <p:sldMasterIdLst>
-    <p:sldMasterId xmlns:r="http://schemas.openxmlformats.org/officeDocument/2006/relationships" id="2147483648" r:id="R55a4b57f00e24799"/>
+    <p:sldMasterId xmlns:r="http://schemas.openxmlformats.org/officeDocument/2006/relationships" id="2147483648" r:id="Rd5a069b206c946f0"/>
   </p:sldMasterIdLst>
   <p:notesMasterIdLst>
-    <p:notesMasterId xmlns:r="http://schemas.openxmlformats.org/officeDocument/2006/relationships" r:id="R53988441ad2541ef"/>
+    <p:notesMasterId xmlns:r="http://schemas.openxmlformats.org/officeDocument/2006/relationships" r:id="R82ba139187884f8e"/>
   </p:notesMasterIdLst>
   <p:sldIdLst>
-    <p:sldId xmlns:r="http://schemas.openxmlformats.org/officeDocument/2006/relationships" id="256" r:id="Rca686ab3d5794fed"/>
-    <p:sldId xmlns:r="http://schemas.openxmlformats.org/officeDocument/2006/relationships" id="257" r:id="R3fc3f011f270486c"/>
-    <p:sldId xmlns:r="http://schemas.openxmlformats.org/officeDocument/2006/relationships" id="258" r:id="Rfc4bc0cd05d34f51"/>
-    <p:sldId xmlns:r="http://schemas.openxmlformats.org/officeDocument/2006/relationships" id="259" r:id="R1b14e709fcca4910"/>
-    <p:sldId xmlns:r="http://schemas.openxmlformats.org/officeDocument/2006/relationships" id="260" r:id="R08855ca5df2d41f8"/>
-    <p:sldId xmlns:r="http://schemas.openxmlformats.org/officeDocument/2006/relationships" id="261" r:id="R428da8e744b44cd5"/>
-    <p:sldId xmlns:r="http://schemas.openxmlformats.org/officeDocument/2006/relationships" id="262" r:id="Rb0378e9b273e46b2"/>
-    <p:sldId xmlns:r="http://schemas.openxmlformats.org/officeDocument/2006/relationships" id="263" r:id="R712a00ea37b24828"/>
-    <p:sldId xmlns:r="http://schemas.openxmlformats.org/officeDocument/2006/relationships" id="264" r:id="R23538451138a4b72"/>
+    <p:sldId xmlns:r="http://schemas.openxmlformats.org/officeDocument/2006/relationships" id="256" r:id="R3d291059a1ff46f7"/>
+    <p:sldId xmlns:r="http://schemas.openxmlformats.org/officeDocument/2006/relationships" id="257" r:id="R327a9dadc87847fc"/>
+    <p:sldId xmlns:r="http://schemas.openxmlformats.org/officeDocument/2006/relationships" id="258" r:id="R575fe944e75c4ffa"/>
+    <p:sldId xmlns:r="http://schemas.openxmlformats.org/officeDocument/2006/relationships" id="259" r:id="Ra832b31a7b7e4bbf"/>
+    <p:sldId xmlns:r="http://schemas.openxmlformats.org/officeDocument/2006/relationships" id="260" r:id="R7e1cd1ae363a4c4d"/>
+    <p:sldId xmlns:r="http://schemas.openxmlformats.org/officeDocument/2006/relationships" id="261" r:id="R9e119e81698c4dd0"/>
+    <p:sldId xmlns:r="http://schemas.openxmlformats.org/officeDocument/2006/relationships" id="262" r:id="R46e3446062344edd"/>
+    <p:sldId xmlns:r="http://schemas.openxmlformats.org/officeDocument/2006/relationships" id="263" r:id="R02a2cd31006b4013"/>
+    <p:sldId xmlns:r="http://schemas.openxmlformats.org/officeDocument/2006/relationships" id="264" r:id="R98ebde7983bc4041"/>
   </p:sldIdLst>
   <p:sldSz cx="12192000" cy="6858000"/>
   <p:notesSz cx="6858000" cy="9144000"/>
@@ -1133,7 +1133,7 @@
   </p:cSld>
   <p:clrMap bg1="lt1" tx1="dk1" bg2="lt2" tx2="dk2" accent1="accent1" accent2="accent2" accent3="accent3" accent4="accent4" accent5="accent5" accent6="accent6" hlink="hlink" folHlink="folHlink"/>
   <p:sldLayoutIdLst>
-    <p:sldLayoutId xmlns:r="http://schemas.openxmlformats.org/officeDocument/2006/relationships" id="2147483649" r:id="R41654042341d48cc"/>
+    <p:sldLayoutId xmlns:r="http://schemas.openxmlformats.org/officeDocument/2006/relationships" id="2147483649" r:id="Re8ef77f035e949a8"/>
   </p:sldLayoutIdLst>
   <p:txStyles>
     <p:titleStyle>
@@ -1677,7 +1677,7 @@
           <p:cNvPr id="4" name="Title-3-1">
             <a:extLst xmlns:a="http://schemas.openxmlformats.org/drawingml/2006/main">
               <a:ext uri="{FF2B5EF4-FFF2-40B4-BE49-F238E27FC236}">
-                <a16:creationId xmlns:a16="http://schemas.microsoft.com/office/drawing/2014/main" id="{CB4199BE-F56D-40E1-8F22-A64308C38989}"/>
+                <a16:creationId xmlns:a16="http://schemas.microsoft.com/office/drawing/2014/main" id="{21E40D2B-723A-497E-BF07-9A8E3181117C}"/>
               </a:ext>
             </a:extLst>
           </p:cNvPr>
@@ -1723,7 +1723,7 @@
           <p:cNvPr id="2" name="Subtitle-4-2">
             <a:extLst xmlns:a="http://schemas.openxmlformats.org/drawingml/2006/main">
               <a:ext uri="{FF2B5EF4-FFF2-40B4-BE49-F238E27FC236}">
-                <a16:creationId xmlns:a16="http://schemas.microsoft.com/office/drawing/2014/main" id="{E996B000-5F1C-453B-B71E-9120A0CC322D}"/>
+                <a16:creationId xmlns:a16="http://schemas.microsoft.com/office/drawing/2014/main" id="{00A643B4-8D63-4C50-B2F9-6FA0A2C0E17B}"/>
               </a:ext>
             </a:extLst>
           </p:cNvPr>
@@ -1768,7 +1768,7 @@
           <p:cNvPr id="3" name="Subtitle-4-3">
             <a:extLst xmlns:a="http://schemas.openxmlformats.org/drawingml/2006/main">
               <a:ext uri="{FF2B5EF4-FFF2-40B4-BE49-F238E27FC236}">
-                <a16:creationId xmlns:a16="http://schemas.microsoft.com/office/drawing/2014/main" id="{A39F1F6E-3488-4B6E-95C4-EE8C9E8F9B3F}"/>
+                <a16:creationId xmlns:a16="http://schemas.microsoft.com/office/drawing/2014/main" id="{2F6A452E-55A8-4EBE-8491-236EEF59D42E}"/>
               </a:ext>
             </a:extLst>
           </p:cNvPr>
@@ -1811,7 +1811,7 @@
     </p:spTree>
     <p:extLst>
       <p:ext uri="{BB962C8B-B14F-4D97-AF65-F5344CB8AC3E}">
-        <p14:creationId xmlns:p14="http://schemas.microsoft.com/office/powerpoint/2010/main" val="248091737"/>
+        <p14:creationId xmlns:p14="http://schemas.microsoft.com/office/powerpoint/2010/main" val="2086585672"/>
       </p:ext>
     </p:extLst>
   </p:cSld>
@@ -1835,7 +1835,7 @@
           <p:cNvPr id="13" name="Slide-Number-Placeholder-3-2">
             <a:extLst xmlns:a="http://schemas.openxmlformats.org/drawingml/2006/main">
               <a:ext uri="{FF2B5EF4-FFF2-40B4-BE49-F238E27FC236}">
-                <a16:creationId xmlns:a16="http://schemas.microsoft.com/office/drawing/2014/main" id="{8377C07F-1A04-457E-8877-9B4BB5D80A62}"/>
+                <a16:creationId xmlns:a16="http://schemas.microsoft.com/office/drawing/2014/main" id="{9C141B1C-71DC-4A4E-953F-3B02445E37BA}"/>
               </a:ext>
             </a:extLst>
           </p:cNvPr>
@@ -1878,7 +1878,7 @@
           <p:cNvPr id="2" name="Title-10-3">
             <a:extLst xmlns:a="http://schemas.openxmlformats.org/drawingml/2006/main">
               <a:ext uri="{FF2B5EF4-FFF2-40B4-BE49-F238E27FC236}">
-                <a16:creationId xmlns:a16="http://schemas.microsoft.com/office/drawing/2014/main" id="{71D41F0C-9633-45CD-9A3B-3FF3685B46C4}"/>
+                <a16:creationId xmlns:a16="http://schemas.microsoft.com/office/drawing/2014/main" id="{C568876A-C0E3-4581-A693-5CA22B5F3B64}"/>
               </a:ext>
             </a:extLst>
           </p:cNvPr>
@@ -1945,7 +1945,7 @@
           <p:cNvPr id="4" name="Google-Shape-2260-p159-5">
             <a:extLst xmlns:a="http://schemas.openxmlformats.org/drawingml/2006/main">
               <a:ext uri="{FF2B5EF4-FFF2-40B4-BE49-F238E27FC236}">
-                <a16:creationId xmlns:a16="http://schemas.microsoft.com/office/drawing/2014/main" id="{18AA9223-8F13-481C-91CA-89798A71C760}"/>
+                <a16:creationId xmlns:a16="http://schemas.microsoft.com/office/drawing/2014/main" id="{EE95C62C-5F31-46A1-9202-6141FFACCB3A}"/>
               </a:ext>
             </a:extLst>
           </p:cNvPr>
@@ -1972,7 +1972,7 @@
           <p:cNvPr id="5" name="Google-Shape-2261-p159-6">
             <a:extLst xmlns:a="http://schemas.openxmlformats.org/drawingml/2006/main">
               <a:ext uri="{FF2B5EF4-FFF2-40B4-BE49-F238E27FC236}">
-                <a16:creationId xmlns:a16="http://schemas.microsoft.com/office/drawing/2014/main" id="{C9A5C044-D33B-4059-9435-C71CCC282394}"/>
+                <a16:creationId xmlns:a16="http://schemas.microsoft.com/office/drawing/2014/main" id="{A8902B44-B69C-4975-8A2B-48B494892DBC}"/>
               </a:ext>
             </a:extLst>
           </p:cNvPr>
@@ -1999,7 +1999,7 @@
           <p:cNvPr id="6" name="Google-Shape-2262-p159-7">
             <a:extLst xmlns:a="http://schemas.openxmlformats.org/drawingml/2006/main">
               <a:ext uri="{FF2B5EF4-FFF2-40B4-BE49-F238E27FC236}">
-                <a16:creationId xmlns:a16="http://schemas.microsoft.com/office/drawing/2014/main" id="{6B00186C-EEB3-4CD3-915B-4F4F0B21A2E6}"/>
+                <a16:creationId xmlns:a16="http://schemas.microsoft.com/office/drawing/2014/main" id="{D1831AEE-1941-42D0-85E6-9B45E6E10E7D}"/>
               </a:ext>
             </a:extLst>
           </p:cNvPr>
@@ -2026,7 +2026,7 @@
           <p:cNvPr id="7" name="Content-Placeholder-15-8">
             <a:extLst xmlns:a="http://schemas.openxmlformats.org/drawingml/2006/main">
               <a:ext uri="{FF2B5EF4-FFF2-40B4-BE49-F238E27FC236}">
-                <a16:creationId xmlns:a16="http://schemas.microsoft.com/office/drawing/2014/main" id="{E4A9BE42-9720-4956-A3DD-1C9A32CC89B1}"/>
+                <a16:creationId xmlns:a16="http://schemas.microsoft.com/office/drawing/2014/main" id="{2906837E-C81F-4EE2-BBD7-808C332AEBB9}"/>
               </a:ext>
             </a:extLst>
           </p:cNvPr>
@@ -2071,7 +2071,7 @@
           <p:cNvPr id="8" name="Content-Placeholder-15-9">
             <a:extLst xmlns:a="http://schemas.openxmlformats.org/drawingml/2006/main">
               <a:ext uri="{FF2B5EF4-FFF2-40B4-BE49-F238E27FC236}">
-                <a16:creationId xmlns:a16="http://schemas.microsoft.com/office/drawing/2014/main" id="{83842DA1-BF73-478A-A8C6-FF09048C51FA}"/>
+                <a16:creationId xmlns:a16="http://schemas.microsoft.com/office/drawing/2014/main" id="{8565AFE9-58BA-4DFC-AEFD-A9F8DA7102B2}"/>
               </a:ext>
             </a:extLst>
           </p:cNvPr>
@@ -2116,7 +2116,7 @@
           <p:cNvPr id="9" name="Content-Placeholder-15-10">
             <a:extLst xmlns:a="http://schemas.openxmlformats.org/drawingml/2006/main">
               <a:ext uri="{FF2B5EF4-FFF2-40B4-BE49-F238E27FC236}">
-                <a16:creationId xmlns:a16="http://schemas.microsoft.com/office/drawing/2014/main" id="{6DEC762B-CAAD-43FD-8C02-E0242E6DC55A}"/>
+                <a16:creationId xmlns:a16="http://schemas.microsoft.com/office/drawing/2014/main" id="{95C21A5B-ECE2-4A81-B2D7-2DBB411776F4}"/>
               </a:ext>
             </a:extLst>
           </p:cNvPr>
@@ -2161,7 +2161,7 @@
           <p:cNvPr id="10" name="Text-Placeholder-16-11">
             <a:extLst xmlns:a="http://schemas.openxmlformats.org/drawingml/2006/main">
               <a:ext uri="{FF2B5EF4-FFF2-40B4-BE49-F238E27FC236}">
-                <a16:creationId xmlns:a16="http://schemas.microsoft.com/office/drawing/2014/main" id="{A7CE3B35-3691-4CDC-939A-22AE7C15E4C7}"/>
+                <a16:creationId xmlns:a16="http://schemas.microsoft.com/office/drawing/2014/main" id="{B8CB0EDB-9B97-4839-9DE0-0D8E0E727879}"/>
               </a:ext>
             </a:extLst>
           </p:cNvPr>
@@ -2222,7 +2222,7 @@
           <p:cNvPr id="11" name="Text-Placeholder-16-12">
             <a:extLst xmlns:a="http://schemas.openxmlformats.org/drawingml/2006/main">
               <a:ext uri="{FF2B5EF4-FFF2-40B4-BE49-F238E27FC236}">
-                <a16:creationId xmlns:a16="http://schemas.microsoft.com/office/drawing/2014/main" id="{AAA77DE9-3106-454A-9321-32E39C4CDF83}"/>
+                <a16:creationId xmlns:a16="http://schemas.microsoft.com/office/drawing/2014/main" id="{844D3B6B-AE49-4D14-9132-8EA0A0B28EE6}"/>
               </a:ext>
             </a:extLst>
           </p:cNvPr>
@@ -2283,7 +2283,7 @@
           <p:cNvPr id="12" name="Text-Placeholder-16-13">
             <a:extLst xmlns:a="http://schemas.openxmlformats.org/drawingml/2006/main">
               <a:ext uri="{FF2B5EF4-FFF2-40B4-BE49-F238E27FC236}">
-                <a16:creationId xmlns:a16="http://schemas.microsoft.com/office/drawing/2014/main" id="{5356EBD8-A92A-4E55-9944-A62C296CFC27}"/>
+                <a16:creationId xmlns:a16="http://schemas.microsoft.com/office/drawing/2014/main" id="{7BBC02DC-7342-4FFE-A418-94AD837127FB}"/>
               </a:ext>
             </a:extLst>
           </p:cNvPr>
@@ -2342,7 +2342,7 @@
     </p:spTree>
     <p:extLst>
       <p:ext uri="{BB962C8B-B14F-4D97-AF65-F5344CB8AC3E}">
-        <p14:creationId xmlns:p14="http://schemas.microsoft.com/office/powerpoint/2010/main" val="1524769871"/>
+        <p14:creationId xmlns:p14="http://schemas.microsoft.com/office/powerpoint/2010/main" val="1226650676"/>
       </p:ext>
     </p:extLst>
   </p:cSld>
@@ -2366,7 +2366,7 @@
           <p:cNvPr id="6" name="Google-Shape-532-p58-2">
             <a:extLst xmlns:a="http://schemas.openxmlformats.org/drawingml/2006/main">
               <a:ext uri="{FF2B5EF4-FFF2-40B4-BE49-F238E27FC236}">
-                <a16:creationId xmlns:a16="http://schemas.microsoft.com/office/drawing/2014/main" id="{BC6DAD36-4478-4611-A9CA-6B1F3DF9DC0B}"/>
+                <a16:creationId xmlns:a16="http://schemas.microsoft.com/office/drawing/2014/main" id="{AD79F504-EF01-4A24-A897-8D343DF056B8}"/>
               </a:ext>
             </a:extLst>
           </p:cNvPr>
@@ -2411,7 +2411,7 @@
           <p:cNvPr id="2" name="Google-Shape-533-p58-3">
             <a:extLst xmlns:a="http://schemas.openxmlformats.org/drawingml/2006/main">
               <a:ext uri="{FF2B5EF4-FFF2-40B4-BE49-F238E27FC236}">
-                <a16:creationId xmlns:a16="http://schemas.microsoft.com/office/drawing/2014/main" id="{41B75822-444F-40A9-AC94-F151C22CB313}"/>
+                <a16:creationId xmlns:a16="http://schemas.microsoft.com/office/drawing/2014/main" id="{95991E69-2CA8-4273-AB29-7C138807D3AF}"/>
               </a:ext>
             </a:extLst>
           </p:cNvPr>
@@ -2456,7 +2456,7 @@
           <p:cNvPr id="3" name="Google-Shape-534-p58-4">
             <a:extLst xmlns:a="http://schemas.openxmlformats.org/drawingml/2006/main">
               <a:ext uri="{FF2B5EF4-FFF2-40B4-BE49-F238E27FC236}">
-                <a16:creationId xmlns:a16="http://schemas.microsoft.com/office/drawing/2014/main" id="{5A5B09B6-E06F-48CD-8B7D-B1D3E663EFDE}"/>
+                <a16:creationId xmlns:a16="http://schemas.microsoft.com/office/drawing/2014/main" id="{4881422C-7C62-45C8-8BFB-F48317540E34}"/>
               </a:ext>
             </a:extLst>
           </p:cNvPr>
@@ -2517,7 +2517,7 @@
           <p:cNvPr id="4" name="Content-Placeholder-1-5">
             <a:extLst xmlns:a="http://schemas.openxmlformats.org/drawingml/2006/main">
               <a:ext uri="{FF2B5EF4-FFF2-40B4-BE49-F238E27FC236}">
-                <a16:creationId xmlns:a16="http://schemas.microsoft.com/office/drawing/2014/main" id="{A6C6CDF4-CCD1-4E0A-B0A3-8CE43A7A27F9}"/>
+                <a16:creationId xmlns:a16="http://schemas.microsoft.com/office/drawing/2014/main" id="{48A7C7BA-77BC-4780-910E-D19CA91D2111}"/>
               </a:ext>
             </a:extLst>
           </p:cNvPr>
@@ -2578,7 +2578,7 @@
           <p:cNvPr id="5" name="Content-Placeholder-2-6">
             <a:extLst xmlns:a="http://schemas.openxmlformats.org/drawingml/2006/main">
               <a:ext uri="{FF2B5EF4-FFF2-40B4-BE49-F238E27FC236}">
-                <a16:creationId xmlns:a16="http://schemas.microsoft.com/office/drawing/2014/main" id="{35225F5F-D11F-4911-9038-93DD39E859C7}"/>
+                <a16:creationId xmlns:a16="http://schemas.microsoft.com/office/drawing/2014/main" id="{86094596-FCBA-4547-9653-50FFCACB96FD}"/>
               </a:ext>
             </a:extLst>
           </p:cNvPr>
@@ -2637,7 +2637,7 @@
     </p:spTree>
     <p:extLst>
       <p:ext uri="{BB962C8B-B14F-4D97-AF65-F5344CB8AC3E}">
-        <p14:creationId xmlns:p14="http://schemas.microsoft.com/office/powerpoint/2010/main" val="1202696742"/>
+        <p14:creationId xmlns:p14="http://schemas.microsoft.com/office/powerpoint/2010/main" val="933958917"/>
       </p:ext>
     </p:extLst>
   </p:cSld>
@@ -2661,7 +2661,7 @@
           <p:cNvPr id="13" name="Rounded-Rectangle-5-1">
             <a:extLst xmlns:a="http://schemas.openxmlformats.org/drawingml/2006/main">
               <a:ext uri="{FF2B5EF4-FFF2-40B4-BE49-F238E27FC236}">
-                <a16:creationId xmlns:a16="http://schemas.microsoft.com/office/drawing/2014/main" id="{E6575A08-AAA1-4C28-8049-8236AF6CA31B}"/>
+                <a16:creationId xmlns:a16="http://schemas.microsoft.com/office/drawing/2014/main" id="{4B98AC2B-806F-426E-B4BB-A380AAE3B2D4}"/>
               </a:ext>
             </a:extLst>
           </p:cNvPr>
@@ -2690,7 +2690,7 @@
           <p:cNvPr id="2" name="Rounded-Rectangle-6-2">
             <a:extLst xmlns:a="http://schemas.openxmlformats.org/drawingml/2006/main">
               <a:ext uri="{FF2B5EF4-FFF2-40B4-BE49-F238E27FC236}">
-                <a16:creationId xmlns:a16="http://schemas.microsoft.com/office/drawing/2014/main" id="{01BD28D3-BD78-42E8-B2DC-DBC7ABE3532F}"/>
+                <a16:creationId xmlns:a16="http://schemas.microsoft.com/office/drawing/2014/main" id="{3072EE8F-07CA-4726-8919-E9FA5E7728DC}"/>
               </a:ext>
             </a:extLst>
           </p:cNvPr>
@@ -2719,7 +2719,7 @@
           <p:cNvPr id="3" name="Rounded-Rectangle-7-3">
             <a:extLst xmlns:a="http://schemas.openxmlformats.org/drawingml/2006/main">
               <a:ext uri="{FF2B5EF4-FFF2-40B4-BE49-F238E27FC236}">
-                <a16:creationId xmlns:a16="http://schemas.microsoft.com/office/drawing/2014/main" id="{1C3BF840-DF34-4E40-BEA3-BEDF6F522D47}"/>
+                <a16:creationId xmlns:a16="http://schemas.microsoft.com/office/drawing/2014/main" id="{6A4413A4-4596-4F0E-8617-05DB84F1B18D}"/>
               </a:ext>
             </a:extLst>
           </p:cNvPr>
@@ -2748,7 +2748,7 @@
           <p:cNvPr id="4" name="Slide-Number-Placeholder-1-4">
             <a:extLst xmlns:a="http://schemas.openxmlformats.org/drawingml/2006/main">
               <a:ext uri="{FF2B5EF4-FFF2-40B4-BE49-F238E27FC236}">
-                <a16:creationId xmlns:a16="http://schemas.microsoft.com/office/drawing/2014/main" id="{99900B72-2279-46DB-BB8D-0B3888DED3EC}"/>
+                <a16:creationId xmlns:a16="http://schemas.microsoft.com/office/drawing/2014/main" id="{1AD8AD34-54B7-45E9-AC4F-25059C6FD9CD}"/>
               </a:ext>
             </a:extLst>
           </p:cNvPr>
@@ -2791,7 +2791,7 @@
           <p:cNvPr id="5" name="Title-2-5">
             <a:extLst xmlns:a="http://schemas.openxmlformats.org/drawingml/2006/main">
               <a:ext uri="{FF2B5EF4-FFF2-40B4-BE49-F238E27FC236}">
-                <a16:creationId xmlns:a16="http://schemas.microsoft.com/office/drawing/2014/main" id="{88DB0B51-3DC0-479C-A63F-17329E6F339F}"/>
+                <a16:creationId xmlns:a16="http://schemas.microsoft.com/office/drawing/2014/main" id="{9DA2D83F-5301-4FE4-ADCE-BF9308CF7DD4}"/>
               </a:ext>
             </a:extLst>
           </p:cNvPr>
@@ -2836,7 +2836,7 @@
           <p:cNvPr id="6" name="Content-Placeholder-9-6">
             <a:extLst xmlns:a="http://schemas.openxmlformats.org/drawingml/2006/main">
               <a:ext uri="{FF2B5EF4-FFF2-40B4-BE49-F238E27FC236}">
-                <a16:creationId xmlns:a16="http://schemas.microsoft.com/office/drawing/2014/main" id="{4B044454-A42C-4B7F-91D5-C173882EBA15}"/>
+                <a16:creationId xmlns:a16="http://schemas.microsoft.com/office/drawing/2014/main" id="{0B1D186B-3D83-48CA-BF6C-DB4428F70B5F}"/>
               </a:ext>
             </a:extLst>
           </p:cNvPr>
@@ -2882,7 +2882,7 @@
           <p:cNvPr id="7" name="Content-Placeholder-10-7">
             <a:extLst xmlns:a="http://schemas.openxmlformats.org/drawingml/2006/main">
               <a:ext uri="{FF2B5EF4-FFF2-40B4-BE49-F238E27FC236}">
-                <a16:creationId xmlns:a16="http://schemas.microsoft.com/office/drawing/2014/main" id="{231E5A9F-E86D-496B-B26D-3B7D6B21BE8F}"/>
+                <a16:creationId xmlns:a16="http://schemas.microsoft.com/office/drawing/2014/main" id="{8A9B2D1F-3D5C-437D-8047-5A6573DE7D98}"/>
               </a:ext>
             </a:extLst>
           </p:cNvPr>
@@ -2928,7 +2928,7 @@
           <p:cNvPr id="8" name="Content-Placeholder-11-8">
             <a:extLst xmlns:a="http://schemas.openxmlformats.org/drawingml/2006/main">
               <a:ext uri="{FF2B5EF4-FFF2-40B4-BE49-F238E27FC236}">
-                <a16:creationId xmlns:a16="http://schemas.microsoft.com/office/drawing/2014/main" id="{F919A1E8-3438-41D9-80D4-455E3A037446}"/>
+                <a16:creationId xmlns:a16="http://schemas.microsoft.com/office/drawing/2014/main" id="{C0C0FDE9-6756-456E-936F-9E47EB828D70}"/>
               </a:ext>
             </a:extLst>
           </p:cNvPr>
@@ -2974,7 +2974,7 @@
           <p:cNvPr id="9" name="Content-Placeholder-9-9">
             <a:extLst xmlns:a="http://schemas.openxmlformats.org/drawingml/2006/main">
               <a:ext uri="{FF2B5EF4-FFF2-40B4-BE49-F238E27FC236}">
-                <a16:creationId xmlns:a16="http://schemas.microsoft.com/office/drawing/2014/main" id="{C57EBA64-E145-4CD7-8DA1-6905FFE06260}"/>
+                <a16:creationId xmlns:a16="http://schemas.microsoft.com/office/drawing/2014/main" id="{24DC5793-92EA-4435-9CFD-C57A5C775D42}"/>
               </a:ext>
             </a:extLst>
           </p:cNvPr>
@@ -3019,7 +3019,7 @@
           <p:cNvPr id="10" name="Content-Placeholder-9-10">
             <a:extLst xmlns:a="http://schemas.openxmlformats.org/drawingml/2006/main">
               <a:ext uri="{FF2B5EF4-FFF2-40B4-BE49-F238E27FC236}">
-                <a16:creationId xmlns:a16="http://schemas.microsoft.com/office/drawing/2014/main" id="{8F1C4BEE-BC9D-4A06-8FE4-EEFD1C8BC525}"/>
+                <a16:creationId xmlns:a16="http://schemas.microsoft.com/office/drawing/2014/main" id="{C4CCD2CF-3C63-4054-98D0-C5DEF07A984E}"/>
               </a:ext>
             </a:extLst>
           </p:cNvPr>
@@ -3064,7 +3064,7 @@
           <p:cNvPr id="11" name="Content-Placeholder-9-11">
             <a:extLst xmlns:a="http://schemas.openxmlformats.org/drawingml/2006/main">
               <a:ext uri="{FF2B5EF4-FFF2-40B4-BE49-F238E27FC236}">
-                <a16:creationId xmlns:a16="http://schemas.microsoft.com/office/drawing/2014/main" id="{E8B43687-F8DE-4C68-9494-8A96B1F72E04}"/>
+                <a16:creationId xmlns:a16="http://schemas.microsoft.com/office/drawing/2014/main" id="{D6F994C0-7F59-4DAD-BEA7-89C2D612B73A}"/>
               </a:ext>
             </a:extLst>
           </p:cNvPr>
@@ -3109,7 +3109,7 @@
           <p:cNvPr id="12" name="Content-Placeholder-15-12">
             <a:extLst xmlns:a="http://schemas.openxmlformats.org/drawingml/2006/main">
               <a:ext uri="{FF2B5EF4-FFF2-40B4-BE49-F238E27FC236}">
-                <a16:creationId xmlns:a16="http://schemas.microsoft.com/office/drawing/2014/main" id="{37E9D2BE-F2A5-40A5-8A3F-F3EA207327E8}"/>
+                <a16:creationId xmlns:a16="http://schemas.microsoft.com/office/drawing/2014/main" id="{4F1A43AF-BF8C-4C6F-9CC2-BCBAC456F2D5}"/>
               </a:ext>
             </a:extLst>
           </p:cNvPr>
@@ -3167,7 +3167,7 @@
     </p:spTree>
     <p:extLst>
       <p:ext uri="{BB962C8B-B14F-4D97-AF65-F5344CB8AC3E}">
-        <p14:creationId xmlns:p14="http://schemas.microsoft.com/office/powerpoint/2010/main" val="1714425590"/>
+        <p14:creationId xmlns:p14="http://schemas.microsoft.com/office/powerpoint/2010/main" val="573827512"/>
       </p:ext>
     </p:extLst>
   </p:cSld>
@@ -3191,7 +3191,7 @@
           <p:cNvPr id="13" name="Slide-Number-Placeholder-3-2">
             <a:extLst xmlns:a="http://schemas.openxmlformats.org/drawingml/2006/main">
               <a:ext uri="{FF2B5EF4-FFF2-40B4-BE49-F238E27FC236}">
-                <a16:creationId xmlns:a16="http://schemas.microsoft.com/office/drawing/2014/main" id="{160DF2C8-0CC4-403D-B740-F02BA6D70AC6}"/>
+                <a16:creationId xmlns:a16="http://schemas.microsoft.com/office/drawing/2014/main" id="{A755B85B-13A5-418E-BB82-D76532E9A914}"/>
               </a:ext>
             </a:extLst>
           </p:cNvPr>
@@ -3234,7 +3234,7 @@
           <p:cNvPr id="2" name="Title-10-3">
             <a:extLst xmlns:a="http://schemas.openxmlformats.org/drawingml/2006/main">
               <a:ext uri="{FF2B5EF4-FFF2-40B4-BE49-F238E27FC236}">
-                <a16:creationId xmlns:a16="http://schemas.microsoft.com/office/drawing/2014/main" id="{2EA32765-3E5C-45F6-B084-1357129B47CD}"/>
+                <a16:creationId xmlns:a16="http://schemas.microsoft.com/office/drawing/2014/main" id="{4A0B3D69-4B41-4718-9E22-437283195AEC}"/>
               </a:ext>
             </a:extLst>
           </p:cNvPr>
@@ -3301,7 +3301,7 @@
           <p:cNvPr id="4" name="Google-Shape-2260-p159-5">
             <a:extLst xmlns:a="http://schemas.openxmlformats.org/drawingml/2006/main">
               <a:ext uri="{FF2B5EF4-FFF2-40B4-BE49-F238E27FC236}">
-                <a16:creationId xmlns:a16="http://schemas.microsoft.com/office/drawing/2014/main" id="{20FC18F2-2BEE-4E48-9BC8-CB67A5EDE2D1}"/>
+                <a16:creationId xmlns:a16="http://schemas.microsoft.com/office/drawing/2014/main" id="{92DDC73F-858E-4065-B963-77560530C59A}"/>
               </a:ext>
             </a:extLst>
           </p:cNvPr>
@@ -3328,7 +3328,7 @@
           <p:cNvPr id="5" name="Google-Shape-2261-p159-6">
             <a:extLst xmlns:a="http://schemas.openxmlformats.org/drawingml/2006/main">
               <a:ext uri="{FF2B5EF4-FFF2-40B4-BE49-F238E27FC236}">
-                <a16:creationId xmlns:a16="http://schemas.microsoft.com/office/drawing/2014/main" id="{1D45ED21-B089-4C96-B326-8CEEB309D15D}"/>
+                <a16:creationId xmlns:a16="http://schemas.microsoft.com/office/drawing/2014/main" id="{15FA0400-559D-4BD0-B040-542CA4430D56}"/>
               </a:ext>
             </a:extLst>
           </p:cNvPr>
@@ -3355,7 +3355,7 @@
           <p:cNvPr id="6" name="Google-Shape-2262-p159-7">
             <a:extLst xmlns:a="http://schemas.openxmlformats.org/drawingml/2006/main">
               <a:ext uri="{FF2B5EF4-FFF2-40B4-BE49-F238E27FC236}">
-                <a16:creationId xmlns:a16="http://schemas.microsoft.com/office/drawing/2014/main" id="{79D41582-BC8F-4EEB-B6CF-FD60F7658374}"/>
+                <a16:creationId xmlns:a16="http://schemas.microsoft.com/office/drawing/2014/main" id="{CCAE9ACC-8D35-47D3-814D-D3C4124119D6}"/>
               </a:ext>
             </a:extLst>
           </p:cNvPr>
@@ -3382,7 +3382,7 @@
           <p:cNvPr id="7" name="Content-Placeholder-15-8">
             <a:extLst xmlns:a="http://schemas.openxmlformats.org/drawingml/2006/main">
               <a:ext uri="{FF2B5EF4-FFF2-40B4-BE49-F238E27FC236}">
-                <a16:creationId xmlns:a16="http://schemas.microsoft.com/office/drawing/2014/main" id="{F58E6E33-5A9C-4C68-93DC-3E3A0419AC07}"/>
+                <a16:creationId xmlns:a16="http://schemas.microsoft.com/office/drawing/2014/main" id="{1E466BF9-24EC-48F7-8DF2-D7C00D2C3C4C}"/>
               </a:ext>
             </a:extLst>
           </p:cNvPr>
@@ -3427,7 +3427,7 @@
           <p:cNvPr id="8" name="Content-Placeholder-15-9">
             <a:extLst xmlns:a="http://schemas.openxmlformats.org/drawingml/2006/main">
               <a:ext uri="{FF2B5EF4-FFF2-40B4-BE49-F238E27FC236}">
-                <a16:creationId xmlns:a16="http://schemas.microsoft.com/office/drawing/2014/main" id="{AC0B6E79-D553-45B8-8A77-8D5F4719D111}"/>
+                <a16:creationId xmlns:a16="http://schemas.microsoft.com/office/drawing/2014/main" id="{13E5CEC7-6228-46E5-9D60-A2C10CB2C4B8}"/>
               </a:ext>
             </a:extLst>
           </p:cNvPr>
@@ -3472,7 +3472,7 @@
           <p:cNvPr id="9" name="Content-Placeholder-15-10">
             <a:extLst xmlns:a="http://schemas.openxmlformats.org/drawingml/2006/main">
               <a:ext uri="{FF2B5EF4-FFF2-40B4-BE49-F238E27FC236}">
-                <a16:creationId xmlns:a16="http://schemas.microsoft.com/office/drawing/2014/main" id="{DD440580-BD22-42BD-B93C-D5C16C95A4E0}"/>
+                <a16:creationId xmlns:a16="http://schemas.microsoft.com/office/drawing/2014/main" id="{36F0C8EC-BAC7-4CFA-BE37-D3CE64772169}"/>
               </a:ext>
             </a:extLst>
           </p:cNvPr>
@@ -3517,7 +3517,7 @@
           <p:cNvPr id="10" name="Text-Placeholder-16-11">
             <a:extLst xmlns:a="http://schemas.openxmlformats.org/drawingml/2006/main">
               <a:ext uri="{FF2B5EF4-FFF2-40B4-BE49-F238E27FC236}">
-                <a16:creationId xmlns:a16="http://schemas.microsoft.com/office/drawing/2014/main" id="{481BA29D-C2DA-4319-B3DC-31DACB9B77F6}"/>
+                <a16:creationId xmlns:a16="http://schemas.microsoft.com/office/drawing/2014/main" id="{B1BD7CC2-B0F8-47A0-8C88-A9A6B26C746C}"/>
               </a:ext>
             </a:extLst>
           </p:cNvPr>
@@ -3578,7 +3578,7 @@
           <p:cNvPr id="11" name="Text-Placeholder-16-12">
             <a:extLst xmlns:a="http://schemas.openxmlformats.org/drawingml/2006/main">
               <a:ext uri="{FF2B5EF4-FFF2-40B4-BE49-F238E27FC236}">
-                <a16:creationId xmlns:a16="http://schemas.microsoft.com/office/drawing/2014/main" id="{200908B8-7980-4F7A-B591-B35AC955A85E}"/>
+                <a16:creationId xmlns:a16="http://schemas.microsoft.com/office/drawing/2014/main" id="{85894650-D651-467E-BA04-1F787EBB570B}"/>
               </a:ext>
             </a:extLst>
           </p:cNvPr>
@@ -3639,7 +3639,7 @@
           <p:cNvPr id="12" name="Text-Placeholder-16-13">
             <a:extLst xmlns:a="http://schemas.openxmlformats.org/drawingml/2006/main">
               <a:ext uri="{FF2B5EF4-FFF2-40B4-BE49-F238E27FC236}">
-                <a16:creationId xmlns:a16="http://schemas.microsoft.com/office/drawing/2014/main" id="{F5B54342-225E-4435-83B6-743F094A8D3A}"/>
+                <a16:creationId xmlns:a16="http://schemas.microsoft.com/office/drawing/2014/main" id="{5743147D-7971-4612-BDB8-3EA9CA3D508D}"/>
               </a:ext>
             </a:extLst>
           </p:cNvPr>
@@ -3698,7 +3698,7 @@
     </p:spTree>
     <p:extLst>
       <p:ext uri="{BB962C8B-B14F-4D97-AF65-F5344CB8AC3E}">
-        <p14:creationId xmlns:p14="http://schemas.microsoft.com/office/powerpoint/2010/main" val="878506539"/>
+        <p14:creationId xmlns:p14="http://schemas.microsoft.com/office/powerpoint/2010/main" val="1027955793"/>
       </p:ext>
     </p:extLst>
   </p:cSld>
@@ -3722,7 +3722,7 @@
           <p:cNvPr id="6" name="Google-Shape-532-p58-2">
             <a:extLst xmlns:a="http://schemas.openxmlformats.org/drawingml/2006/main">
               <a:ext uri="{FF2B5EF4-FFF2-40B4-BE49-F238E27FC236}">
-                <a16:creationId xmlns:a16="http://schemas.microsoft.com/office/drawing/2014/main" id="{1B7690CB-3002-4F60-A736-CEA63442B899}"/>
+                <a16:creationId xmlns:a16="http://schemas.microsoft.com/office/drawing/2014/main" id="{E459D355-A7C1-40FA-84A9-59B70849E660}"/>
               </a:ext>
             </a:extLst>
           </p:cNvPr>
@@ -3767,7 +3767,7 @@
           <p:cNvPr id="2" name="Google-Shape-533-p58-3">
             <a:extLst xmlns:a="http://schemas.openxmlformats.org/drawingml/2006/main">
               <a:ext uri="{FF2B5EF4-FFF2-40B4-BE49-F238E27FC236}">
-                <a16:creationId xmlns:a16="http://schemas.microsoft.com/office/drawing/2014/main" id="{D56F5357-2454-4F8A-B542-2626CEC21CC5}"/>
+                <a16:creationId xmlns:a16="http://schemas.microsoft.com/office/drawing/2014/main" id="{8721B808-EB69-4D6F-B419-4C7CB1751675}"/>
               </a:ext>
             </a:extLst>
           </p:cNvPr>
@@ -3812,7 +3812,7 @@
           <p:cNvPr id="3" name="Google-Shape-534-p58-4">
             <a:extLst xmlns:a="http://schemas.openxmlformats.org/drawingml/2006/main">
               <a:ext uri="{FF2B5EF4-FFF2-40B4-BE49-F238E27FC236}">
-                <a16:creationId xmlns:a16="http://schemas.microsoft.com/office/drawing/2014/main" id="{071CE833-006E-4E8D-9815-51BDC4FB1DD1}"/>
+                <a16:creationId xmlns:a16="http://schemas.microsoft.com/office/drawing/2014/main" id="{8DB3E325-86BE-43F1-9682-A9885FED98EC}"/>
               </a:ext>
             </a:extLst>
           </p:cNvPr>
@@ -3873,7 +3873,7 @@
           <p:cNvPr id="4" name="Content-Placeholder-1-5">
             <a:extLst xmlns:a="http://schemas.openxmlformats.org/drawingml/2006/main">
               <a:ext uri="{FF2B5EF4-FFF2-40B4-BE49-F238E27FC236}">
-                <a16:creationId xmlns:a16="http://schemas.microsoft.com/office/drawing/2014/main" id="{7D1DBF39-5756-48D3-842F-84A29892FEC2}"/>
+                <a16:creationId xmlns:a16="http://schemas.microsoft.com/office/drawing/2014/main" id="{3FFE7F70-50DE-4541-A43D-C0492C1BA008}"/>
               </a:ext>
             </a:extLst>
           </p:cNvPr>
@@ -3934,7 +3934,7 @@
           <p:cNvPr id="5" name="Content-Placeholder-2-6">
             <a:extLst xmlns:a="http://schemas.openxmlformats.org/drawingml/2006/main">
               <a:ext uri="{FF2B5EF4-FFF2-40B4-BE49-F238E27FC236}">
-                <a16:creationId xmlns:a16="http://schemas.microsoft.com/office/drawing/2014/main" id="{8C6BB33D-E22A-4701-ABD3-FF2D756BEA7B}"/>
+                <a16:creationId xmlns:a16="http://schemas.microsoft.com/office/drawing/2014/main" id="{72E2FBEE-1DA2-4EC2-A8A1-20D30DBEBBFA}"/>
               </a:ext>
             </a:extLst>
           </p:cNvPr>
@@ -3993,7 +3993,7 @@
     </p:spTree>
     <p:extLst>
       <p:ext uri="{BB962C8B-B14F-4D97-AF65-F5344CB8AC3E}">
-        <p14:creationId xmlns:p14="http://schemas.microsoft.com/office/powerpoint/2010/main" val="1324341816"/>
+        <p14:creationId xmlns:p14="http://schemas.microsoft.com/office/powerpoint/2010/main" val="416930575"/>
       </p:ext>
     </p:extLst>
   </p:cSld>
@@ -4017,7 +4017,7 @@
           <p:cNvPr id="13" name="Slide-Number-Placeholder-3-2">
             <a:extLst xmlns:a="http://schemas.openxmlformats.org/drawingml/2006/main">
               <a:ext uri="{FF2B5EF4-FFF2-40B4-BE49-F238E27FC236}">
-                <a16:creationId xmlns:a16="http://schemas.microsoft.com/office/drawing/2014/main" id="{A9803BE6-2707-48D6-A1B7-4892C5C9FB92}"/>
+                <a16:creationId xmlns:a16="http://schemas.microsoft.com/office/drawing/2014/main" id="{E80935A7-0A15-40E7-BFDF-D02E2F24F1D3}"/>
               </a:ext>
             </a:extLst>
           </p:cNvPr>
@@ -4060,7 +4060,7 @@
           <p:cNvPr id="2" name="Title-10-3">
             <a:extLst xmlns:a="http://schemas.openxmlformats.org/drawingml/2006/main">
               <a:ext uri="{FF2B5EF4-FFF2-40B4-BE49-F238E27FC236}">
-                <a16:creationId xmlns:a16="http://schemas.microsoft.com/office/drawing/2014/main" id="{03B2C6D9-1350-41D4-B7EC-5437EAFF1A97}"/>
+                <a16:creationId xmlns:a16="http://schemas.microsoft.com/office/drawing/2014/main" id="{04135917-C0C1-42B2-8FBD-2A810D205146}"/>
               </a:ext>
             </a:extLst>
           </p:cNvPr>
@@ -4127,7 +4127,7 @@
           <p:cNvPr id="4" name="Google-Shape-2260-p159-5">
             <a:extLst xmlns:a="http://schemas.openxmlformats.org/drawingml/2006/main">
               <a:ext uri="{FF2B5EF4-FFF2-40B4-BE49-F238E27FC236}">
-                <a16:creationId xmlns:a16="http://schemas.microsoft.com/office/drawing/2014/main" id="{94A77997-C517-4487-8982-41892CDC6866}"/>
+                <a16:creationId xmlns:a16="http://schemas.microsoft.com/office/drawing/2014/main" id="{E8CCE519-9A4B-4FA7-A88C-2D15026800A8}"/>
               </a:ext>
             </a:extLst>
           </p:cNvPr>
@@ -4154,7 +4154,7 @@
           <p:cNvPr id="5" name="Google-Shape-2261-p159-6">
             <a:extLst xmlns:a="http://schemas.openxmlformats.org/drawingml/2006/main">
               <a:ext uri="{FF2B5EF4-FFF2-40B4-BE49-F238E27FC236}">
-                <a16:creationId xmlns:a16="http://schemas.microsoft.com/office/drawing/2014/main" id="{86BB64BF-075A-4B80-8D1D-5DFBDB624B36}"/>
+                <a16:creationId xmlns:a16="http://schemas.microsoft.com/office/drawing/2014/main" id="{CD89CD39-9432-4067-A9B7-B20340DF71BE}"/>
               </a:ext>
             </a:extLst>
           </p:cNvPr>
@@ -4181,7 +4181,7 @@
           <p:cNvPr id="6" name="Google-Shape-2262-p159-7">
             <a:extLst xmlns:a="http://schemas.openxmlformats.org/drawingml/2006/main">
               <a:ext uri="{FF2B5EF4-FFF2-40B4-BE49-F238E27FC236}">
-                <a16:creationId xmlns:a16="http://schemas.microsoft.com/office/drawing/2014/main" id="{26306121-D30C-4E5E-9D73-6B1D2D9F11BA}"/>
+                <a16:creationId xmlns:a16="http://schemas.microsoft.com/office/drawing/2014/main" id="{37A15CA5-BEF7-4B09-93C5-11E309503E08}"/>
               </a:ext>
             </a:extLst>
           </p:cNvPr>
@@ -4208,7 +4208,7 @@
           <p:cNvPr id="7" name="Content-Placeholder-15-8">
             <a:extLst xmlns:a="http://schemas.openxmlformats.org/drawingml/2006/main">
               <a:ext uri="{FF2B5EF4-FFF2-40B4-BE49-F238E27FC236}">
-                <a16:creationId xmlns:a16="http://schemas.microsoft.com/office/drawing/2014/main" id="{FC30B5D6-BCB5-4DE8-8916-03E926D18191}"/>
+                <a16:creationId xmlns:a16="http://schemas.microsoft.com/office/drawing/2014/main" id="{5C18E9BD-E451-40F2-B657-609956D188FB}"/>
               </a:ext>
             </a:extLst>
           </p:cNvPr>
@@ -4253,7 +4253,7 @@
           <p:cNvPr id="8" name="Content-Placeholder-15-9">
             <a:extLst xmlns:a="http://schemas.openxmlformats.org/drawingml/2006/main">
               <a:ext uri="{FF2B5EF4-FFF2-40B4-BE49-F238E27FC236}">
-                <a16:creationId xmlns:a16="http://schemas.microsoft.com/office/drawing/2014/main" id="{D6E88CF4-1CA0-4243-A798-C383803FED13}"/>
+                <a16:creationId xmlns:a16="http://schemas.microsoft.com/office/drawing/2014/main" id="{A92A9A85-31DD-445D-9567-9C101BFF4433}"/>
               </a:ext>
             </a:extLst>
           </p:cNvPr>
@@ -4298,7 +4298,7 @@
           <p:cNvPr id="9" name="Content-Placeholder-15-10">
             <a:extLst xmlns:a="http://schemas.openxmlformats.org/drawingml/2006/main">
               <a:ext uri="{FF2B5EF4-FFF2-40B4-BE49-F238E27FC236}">
-                <a16:creationId xmlns:a16="http://schemas.microsoft.com/office/drawing/2014/main" id="{CBFDEDF0-492F-4A9D-A29A-38BF927315B8}"/>
+                <a16:creationId xmlns:a16="http://schemas.microsoft.com/office/drawing/2014/main" id="{C2DFBF49-976A-48BE-9C58-14307FB57AF5}"/>
               </a:ext>
             </a:extLst>
           </p:cNvPr>
@@ -4343,7 +4343,7 @@
           <p:cNvPr id="10" name="Text-Placeholder-16-11">
             <a:extLst xmlns:a="http://schemas.openxmlformats.org/drawingml/2006/main">
               <a:ext uri="{FF2B5EF4-FFF2-40B4-BE49-F238E27FC236}">
-                <a16:creationId xmlns:a16="http://schemas.microsoft.com/office/drawing/2014/main" id="{A46006C9-D183-4529-9DBE-E39F26F5A204}"/>
+                <a16:creationId xmlns:a16="http://schemas.microsoft.com/office/drawing/2014/main" id="{00BE0CE1-2037-4787-99C5-B25C11873989}"/>
               </a:ext>
             </a:extLst>
           </p:cNvPr>
@@ -4404,7 +4404,7 @@
           <p:cNvPr id="11" name="Text-Placeholder-16-12">
             <a:extLst xmlns:a="http://schemas.openxmlformats.org/drawingml/2006/main">
               <a:ext uri="{FF2B5EF4-FFF2-40B4-BE49-F238E27FC236}">
-                <a16:creationId xmlns:a16="http://schemas.microsoft.com/office/drawing/2014/main" id="{947DF48A-E68F-4BB7-8913-5309ACFE81F8}"/>
+                <a16:creationId xmlns:a16="http://schemas.microsoft.com/office/drawing/2014/main" id="{CA6A023B-79AA-41DD-BB4C-CB626EC34A6C}"/>
               </a:ext>
             </a:extLst>
           </p:cNvPr>
@@ -4465,7 +4465,7 @@
           <p:cNvPr id="12" name="Text-Placeholder-16-13">
             <a:extLst xmlns:a="http://schemas.openxmlformats.org/drawingml/2006/main">
               <a:ext uri="{FF2B5EF4-FFF2-40B4-BE49-F238E27FC236}">
-                <a16:creationId xmlns:a16="http://schemas.microsoft.com/office/drawing/2014/main" id="{C802DDD3-4A49-42C0-AE96-9C30CF5BD7EF}"/>
+                <a16:creationId xmlns:a16="http://schemas.microsoft.com/office/drawing/2014/main" id="{AFF70DBF-D7A7-48CA-A075-650AE1F3618D}"/>
               </a:ext>
             </a:extLst>
           </p:cNvPr>
@@ -4524,7 +4524,7 @@
     </p:spTree>
     <p:extLst>
       <p:ext uri="{BB962C8B-B14F-4D97-AF65-F5344CB8AC3E}">
-        <p14:creationId xmlns:p14="http://schemas.microsoft.com/office/powerpoint/2010/main" val="449866176"/>
+        <p14:creationId xmlns:p14="http://schemas.microsoft.com/office/powerpoint/2010/main" val="809156650"/>
       </p:ext>
     </p:extLst>
   </p:cSld>
@@ -4548,7 +4548,7 @@
           <p:cNvPr id="4" name="Title-3-1">
             <a:extLst xmlns:a="http://schemas.openxmlformats.org/drawingml/2006/main">
               <a:ext uri="{FF2B5EF4-FFF2-40B4-BE49-F238E27FC236}">
-                <a16:creationId xmlns:a16="http://schemas.microsoft.com/office/drawing/2014/main" id="{467E9693-851F-4760-8265-139BFBDDCF33}"/>
+                <a16:creationId xmlns:a16="http://schemas.microsoft.com/office/drawing/2014/main" id="{492B5A6A-7449-498C-9F72-82E76F0BA082}"/>
               </a:ext>
             </a:extLst>
           </p:cNvPr>
@@ -4584,7 +4584,7 @@
             </a:pPr>
             <a:r>
               <a:t>품질·보안·E2E 검증
-OpenAI 확인 완료 · D0 유지</a:t>
+보존 정책 확정 · 보안 Gate</a:t>
             </a:r>
           </a:p>
         </p:txBody>
@@ -4594,7 +4594,7 @@
           <p:cNvPr id="2" name="Subtitle-4-2">
             <a:extLst xmlns:a="http://schemas.openxmlformats.org/drawingml/2006/main">
               <a:ext uri="{FF2B5EF4-FFF2-40B4-BE49-F238E27FC236}">
-                <a16:creationId xmlns:a16="http://schemas.microsoft.com/office/drawing/2014/main" id="{FFD6ACFD-5763-4939-9397-CA6F25D0BBD0}"/>
+                <a16:creationId xmlns:a16="http://schemas.microsoft.com/office/drawing/2014/main" id="{ADAF9FEF-C9BD-4617-A985-AC9E549E4E9F}"/>
               </a:ext>
             </a:extLst>
           </p:cNvPr>
@@ -4639,7 +4639,7 @@
           <p:cNvPr id="3" name="Subtitle-4-3">
             <a:extLst xmlns:a="http://schemas.openxmlformats.org/drawingml/2006/main">
               <a:ext uri="{FF2B5EF4-FFF2-40B4-BE49-F238E27FC236}">
-                <a16:creationId xmlns:a16="http://schemas.microsoft.com/office/drawing/2014/main" id="{CFB8B269-2A0E-4660-B194-541D7976BC51}"/>
+                <a16:creationId xmlns:a16="http://schemas.microsoft.com/office/drawing/2014/main" id="{444F3387-180F-43E6-8FD2-CD6C733F9BAF}"/>
               </a:ext>
             </a:extLst>
           </p:cNvPr>
@@ -4682,7 +4682,7 @@
     </p:spTree>
     <p:extLst>
       <p:ext uri="{BB962C8B-B14F-4D97-AF65-F5344CB8AC3E}">
-        <p14:creationId xmlns:p14="http://schemas.microsoft.com/office/powerpoint/2010/main" val="215408561"/>
+        <p14:creationId xmlns:p14="http://schemas.microsoft.com/office/powerpoint/2010/main" val="1122964947"/>
       </p:ext>
     </p:extLst>
   </p:cSld>
@@ -4706,7 +4706,7 @@
           <p:cNvPr id="4" name="Title-3-1">
             <a:extLst xmlns:a="http://schemas.openxmlformats.org/drawingml/2006/main">
               <a:ext uri="{FF2B5EF4-FFF2-40B4-BE49-F238E27FC236}">
-                <a16:creationId xmlns:a16="http://schemas.microsoft.com/office/drawing/2014/main" id="{EFEFD58E-4903-4761-88D7-3E5F7F4C1186}"/>
+                <a16:creationId xmlns:a16="http://schemas.microsoft.com/office/drawing/2014/main" id="{0CB4634B-2FF3-43D8-BB6F-DBC2B95731B2}"/>
               </a:ext>
             </a:extLst>
           </p:cNvPr>
@@ -4751,7 +4751,7 @@
           <p:cNvPr id="2" name="Subtitle-4-2">
             <a:extLst xmlns:a="http://schemas.openxmlformats.org/drawingml/2006/main">
               <a:ext uri="{FF2B5EF4-FFF2-40B4-BE49-F238E27FC236}">
-                <a16:creationId xmlns:a16="http://schemas.microsoft.com/office/drawing/2014/main" id="{51286A79-FAEA-4EF5-BE0C-4B15715DCC87}"/>
+                <a16:creationId xmlns:a16="http://schemas.microsoft.com/office/drawing/2014/main" id="{8AFE5189-34FA-4FD0-9311-BE3591D2A250}"/>
               </a:ext>
             </a:extLst>
           </p:cNvPr>
@@ -4826,7 +4826,7 @@
           <p:cNvPr id="3" name="Subtitle-4-3">
             <a:extLst xmlns:a="http://schemas.openxmlformats.org/drawingml/2006/main">
               <a:ext uri="{FF2B5EF4-FFF2-40B4-BE49-F238E27FC236}">
-                <a16:creationId xmlns:a16="http://schemas.microsoft.com/office/drawing/2014/main" id="{A0FA959B-0DDD-497C-9A96-CE5F0F5B5958}"/>
+                <a16:creationId xmlns:a16="http://schemas.microsoft.com/office/drawing/2014/main" id="{E186463E-7A7C-4B5D-A2D7-077E566E17BC}"/>
               </a:ext>
             </a:extLst>
           </p:cNvPr>
@@ -4869,7 +4869,7 @@
     </p:spTree>
     <p:extLst>
       <p:ext uri="{BB962C8B-B14F-4D97-AF65-F5344CB8AC3E}">
-        <p14:creationId xmlns:p14="http://schemas.microsoft.com/office/powerpoint/2010/main" val="516268049"/>
+        <p14:creationId xmlns:p14="http://schemas.microsoft.com/office/powerpoint/2010/main" val="1443930184"/>
       </p:ext>
     </p:extLst>
   </p:cSld>
